--- a/light-refract/1016/slides.pptx
+++ b/light-refract/1016/slides.pptx
@@ -3454,7 +3454,7 @@
                 <a:ea typeface="微軟正黑體"/>
                 <a:cs typeface="微軟正黑體"/>
               </a:rPr>
-              <a:t>2　透鏡快問＋放大鏡偵探</a:t>
+              <a:t>2　透鏡快問＋放大鏡偵探（含影片）</a:t>
             </a:r>
           </a:p>
         </p:txBody>
@@ -3959,7 +3959,7 @@
                 <a:ea typeface="微軟正黑體"/>
                 <a:cs typeface="微軟正黑體"/>
               </a:rPr>
-              <a:t>透鏡快問＋放大鏡偵探</a:t>
+              <a:t>透鏡快問＋放大鏡偵探（含影片）</a:t>
             </a:r>
           </a:p>
         </p:txBody>
@@ -6829,7 +6829,7 @@
                 <a:ea typeface="微軟正黑體"/>
                 <a:cs typeface="微軟正黑體"/>
               </a:rPr>
-              <a:t>先猜再揭曉：字變大？景色倒過來？光聚到焦點？一直按「下一步」就好。</a:t>
+              <a:t>裡面有 2 支影片（點電視畫面就播放），再先猜後揭曉：字變大？景色倒過來？一直按「下一步」就好。</a:t>
             </a:r>
           </a:p>
         </p:txBody>

--- a/light-refract/1016/slides.pptx
+++ b/light-refract/1016/slides.pptx
@@ -14,6 +14,7 @@
     <p:sldId id="262" r:id="rId13"/>
     <p:sldId id="263" r:id="rId14"/>
     <p:sldId id="264" r:id="rId15"/>
+    <p:sldId id="265" r:id="rId16"/>
   </p:sldIdLst>
   <p:sldSz cx="12191695" cy="6858000" type="screen4x3"/>
   <p:notesSz cx="6858000" cy="9144000"/>
@@ -3413,7 +3414,7 @@
                 <a:ea typeface="微軟正黑體"/>
                 <a:cs typeface="微軟正黑體"/>
               </a:rPr>
-              <a:t>1　MV〈折一下 Snap!〉</a:t>
+              <a:t>1　MV＋影片：太陽聚光</a:t>
             </a:r>
           </a:p>
         </p:txBody>
@@ -3454,7 +3455,7 @@
                 <a:ea typeface="微軟正黑體"/>
                 <a:cs typeface="微軟正黑體"/>
               </a:rPr>
-              <a:t>2　透鏡快問＋放大鏡偵探（含影片）</a:t>
+              <a:t>2　透鏡快問＋放大鏡偵探</a:t>
             </a:r>
           </a:p>
         </p:txBody>
@@ -3549,6 +3550,403 @@
   <p:transition spd="med">
     <p:fade/>
   </p:transition>
+</p:sld>
+</file>
+
+<file path=ppt/slides/slide10.xml><?xml version="1.0" encoding="utf-8"?>
+<p:sld xmlns:a="http://schemas.openxmlformats.org/drawingml/2006/main" xmlns:p="http://schemas.openxmlformats.org/presentationml/2006/main" xmlns:r="http://schemas.openxmlformats.org/officeDocument/2006/relationships">
+  <p:cSld>
+    <p:spTree>
+      <p:nvGrpSpPr>
+        <p:cNvPr id="1" name=""/>
+        <p:cNvGrpSpPr/>
+        <p:nvPr/>
+      </p:nvGrpSpPr>
+      <p:grpSpPr/>
+      <p:sp>
+        <p:nvSpPr>
+          <p:cNvPr id="2" name="Rectangle 1"/>
+          <p:cNvSpPr/>
+          <p:nvPr/>
+        </p:nvSpPr>
+        <p:spPr>
+          <a:xfrm>
+            <a:off x="0" y="0"/>
+            <a:ext cx="12191695" cy="6858000"/>
+          </a:xfrm>
+          <a:prstGeom prst="rect">
+            <a:avLst/>
+          </a:prstGeom>
+          <a:solidFill>
+            <a:srgbClr val="0E1620"/>
+          </a:solidFill>
+          <a:ln>
+            <a:noFill/>
+          </a:ln>
+          <a:effectLst/>
+        </p:spPr>
+        <p:style>
+          <a:lnRef idx="1">
+            <a:schemeClr val="accent1"/>
+          </a:lnRef>
+          <a:fillRef idx="3">
+            <a:schemeClr val="accent1"/>
+          </a:fillRef>
+          <a:effectRef idx="2">
+            <a:schemeClr val="accent1"/>
+          </a:effectRef>
+          <a:fontRef idx="minor">
+            <a:schemeClr val="lt1"/>
+          </a:fontRef>
+        </p:style>
+        <p:txBody>
+          <a:bodyPr rtlCol="0" anchor="ctr"/>
+          <a:lstStyle/>
+          <a:p>
+            <a:pPr algn="ctr"/>
+          </a:p>
+        </p:txBody>
+      </p:sp>
+      <p:pic>
+        <p:nvPicPr>
+          <p:cNvPr id="3" name="Picture 2" descr="stage.jpg"/>
+          <p:cNvPicPr>
+            <a:picLocks noChangeAspect="1"/>
+          </p:cNvPicPr>
+          <p:nvPr/>
+        </p:nvPicPr>
+        <p:blipFill>
+          <a:blip r:embed="rId2"/>
+          <a:stretch>
+            <a:fillRect/>
+          </a:stretch>
+        </p:blipFill>
+        <p:spPr>
+          <a:xfrm>
+            <a:off x="0" y="26729"/>
+            <a:ext cx="12191695" cy="6804540"/>
+          </a:xfrm>
+          <a:prstGeom prst="rect">
+            <a:avLst/>
+          </a:prstGeom>
+        </p:spPr>
+      </p:pic>
+      <p:sp>
+        <p:nvSpPr>
+          <p:cNvPr id="4" name="Rectangle 3"/>
+          <p:cNvSpPr/>
+          <p:nvPr/>
+        </p:nvSpPr>
+        <p:spPr>
+          <a:xfrm>
+            <a:off x="0" y="0"/>
+            <a:ext cx="12191695" cy="6858000"/>
+          </a:xfrm>
+          <a:prstGeom prst="rect">
+            <a:avLst/>
+          </a:prstGeom>
+          <a:solidFill>
+            <a:srgbClr val="0E1620">
+              <a:alpha val="45000"/>
+            </a:srgbClr>
+          </a:solidFill>
+          <a:ln>
+            <a:noFill/>
+          </a:ln>
+          <a:effectLst/>
+        </p:spPr>
+        <p:style>
+          <a:lnRef idx="1">
+            <a:schemeClr val="accent1"/>
+          </a:lnRef>
+          <a:fillRef idx="3">
+            <a:schemeClr val="accent1"/>
+          </a:fillRef>
+          <a:effectRef idx="2">
+            <a:schemeClr val="accent1"/>
+          </a:effectRef>
+          <a:fontRef idx="minor">
+            <a:schemeClr val="lt1"/>
+          </a:fontRef>
+        </p:style>
+        <p:txBody>
+          <a:bodyPr rtlCol="0" anchor="ctr"/>
+          <a:lstStyle/>
+          <a:p>
+            <a:pPr algn="ctr"/>
+          </a:p>
+        </p:txBody>
+      </p:sp>
+      <p:sp>
+        <p:nvSpPr>
+          <p:cNvPr id="5" name="TextBox 4"/>
+          <p:cNvSpPr txBox="1"/>
+          <p:nvPr/>
+        </p:nvSpPr>
+        <p:spPr>
+          <a:xfrm>
+            <a:off x="731520" y="2377440"/>
+            <a:ext cx="10058400" cy="1280160"/>
+          </a:xfrm>
+          <a:prstGeom prst="rect">
+            <a:avLst/>
+          </a:prstGeom>
+          <a:noFill/>
+        </p:spPr>
+        <p:txBody>
+          <a:bodyPr wrap="square" anchor="t" lIns="45720" rIns="45720">
+            <a:spAutoFit/>
+          </a:bodyPr>
+          <a:lstStyle/>
+          <a:p>
+            <a:pPr algn="l">
+              <a:lnSpc>
+                <a:spcPct val="112000"/>
+              </a:lnSpc>
+            </a:pPr>
+            <a:r>
+              <a:rPr sz="7200" b="1">
+                <a:solidFill>
+                  <a:srgbClr val="FFFFFF"/>
+                </a:solidFill>
+                <a:latin typeface="微軟正黑體"/>
+                <a:ea typeface="微軟正黑體"/>
+                <a:cs typeface="微軟正黑體"/>
+              </a:rPr>
+              <a:t>下課囉！</a:t>
+            </a:r>
+          </a:p>
+        </p:txBody>
+      </p:sp>
+      <p:sp>
+        <p:nvSpPr>
+          <p:cNvPr id="6" name="TextBox 5"/>
+          <p:cNvSpPr txBox="1"/>
+          <p:nvPr/>
+        </p:nvSpPr>
+        <p:spPr>
+          <a:xfrm>
+            <a:off x="777240" y="3749039"/>
+            <a:ext cx="10058400" cy="731520"/>
+          </a:xfrm>
+          <a:prstGeom prst="rect">
+            <a:avLst/>
+          </a:prstGeom>
+          <a:noFill/>
+        </p:spPr>
+        <p:txBody>
+          <a:bodyPr wrap="square" anchor="t" lIns="45720" rIns="45720">
+            <a:spAutoFit/>
+          </a:bodyPr>
+          <a:lstStyle/>
+          <a:p>
+            <a:pPr algn="l">
+              <a:lnSpc>
+                <a:spcPct val="112000"/>
+              </a:lnSpc>
+            </a:pPr>
+            <a:r>
+              <a:rPr sz="3000" b="0">
+                <a:solidFill>
+                  <a:srgbClr val="FFE9A8"/>
+                </a:solidFill>
+                <a:latin typeface="微軟正黑體"/>
+                <a:ea typeface="微軟正黑體"/>
+                <a:cs typeface="微軟正黑體"/>
+              </a:rPr>
+              <a:t>今天的光線特勤隊，表現超棒。</a:t>
+            </a:r>
+          </a:p>
+        </p:txBody>
+      </p:sp>
+    </p:spTree>
+  </p:cSld>
+  <p:clrMapOvr>
+    <a:masterClrMapping/>
+  </p:clrMapOvr>
+  <p:transition spd="med">
+    <p:fade/>
+  </p:transition>
+  <p:timing>
+    <p:tnLst>
+      <p:par>
+        <p:cTn id="1" dur="indefinite" restart="never" nodeType="tmRoot">
+          <p:childTnLst>
+            <p:seq concurrent="1" nextAc="seek">
+              <p:cTn id="2" dur="indefinite" nodeType="mainSeq">
+                <p:childTnLst>
+                  <p:par>
+                    <p:cTn id="3" fill="hold">
+                      <p:stCondLst>
+                        <p:cond delay="indefinite"/>
+                        <p:cond evt="onBegin" delay="0">
+                          <p:tn val="2"/>
+                        </p:cond>
+                      </p:stCondLst>
+                      <p:childTnLst>
+                        <p:par>
+                          <p:cTn id="4" fill="hold">
+                            <p:stCondLst>
+                              <p:cond delay="0"/>
+                            </p:stCondLst>
+                            <p:childTnLst>
+                              <p:par>
+                                <p:cTn id="5" presetID="53" presetClass="entr" presetSubtype="16" fill="hold" grpId="0" nodeType="afterEffect">
+                                  <p:stCondLst>
+                                    <p:cond delay="0"/>
+                                  </p:stCondLst>
+                                  <p:childTnLst>
+                                    <p:set>
+                                      <p:cBhvr>
+                                        <p:cTn id="6" dur="1" fill="hold">
+                                          <p:stCondLst>
+                                            <p:cond delay="0"/>
+                                          </p:stCondLst>
+                                        </p:cTn>
+                                        <p:tgtEl>
+                                          <p:spTgt spid="5"/>
+                                        </p:tgtEl>
+                                        <p:attrNameLst>
+                                          <p:attrName>style.visibility</p:attrName>
+                                        </p:attrNameLst>
+                                      </p:cBhvr>
+                                      <p:to>
+                                        <p:strVal val="visible"/>
+                                      </p:to>
+                                    </p:set>
+                                    <p:anim calcmode="lin" valueType="num">
+                                      <p:cBhvr additive="base">
+                                        <p:cTn id="7" dur="500" fill="hold"/>
+                                        <p:tgtEl>
+                                          <p:spTgt spid="5"/>
+                                        </p:tgtEl>
+                                        <p:attrNameLst>
+                                          <p:attrName>ppt_w</p:attrName>
+                                        </p:attrNameLst>
+                                      </p:cBhvr>
+                                      <p:tavLst>
+                                        <p:tav tm="0">
+                                          <p:val>
+                                            <p:strVal val="0"/>
+                                          </p:val>
+                                        </p:tav>
+                                        <p:tav tm="100000">
+                                          <p:val>
+                                            <p:strVal val="#ppt_w"/>
+                                          </p:val>
+                                        </p:tav>
+                                      </p:tavLst>
+                                    </p:anim>
+                                    <p:anim calcmode="lin" valueType="num">
+                                      <p:cBhvr additive="base">
+                                        <p:cTn id="8" dur="500" fill="hold"/>
+                                        <p:tgtEl>
+                                          <p:spTgt spid="5"/>
+                                        </p:tgtEl>
+                                        <p:attrNameLst>
+                                          <p:attrName>ppt_h</p:attrName>
+                                        </p:attrNameLst>
+                                      </p:cBhvr>
+                                      <p:tavLst>
+                                        <p:tav tm="0">
+                                          <p:val>
+                                            <p:strVal val="0"/>
+                                          </p:val>
+                                        </p:tav>
+                                        <p:tav tm="100000">
+                                          <p:val>
+                                            <p:strVal val="#ppt_h"/>
+                                          </p:val>
+                                        </p:tav>
+                                      </p:tavLst>
+                                    </p:anim>
+                                    <p:animEffect transition="in" filter="fade">
+                                      <p:cBhvr>
+                                        <p:cTn id="9" dur="500"/>
+                                        <p:tgtEl>
+                                          <p:spTgt spid="5"/>
+                                        </p:tgtEl>
+                                      </p:cBhvr>
+                                    </p:animEffect>
+                                  </p:childTnLst>
+                                </p:cTn>
+                              </p:par>
+                            </p:childTnLst>
+                          </p:cTn>
+                        </p:par>
+                        <p:par>
+                          <p:cTn id="10" fill="hold">
+                            <p:stCondLst>
+                              <p:cond delay="280"/>
+                            </p:stCondLst>
+                            <p:childTnLst>
+                              <p:par>
+                                <p:cTn id="11" presetID="10" presetClass="entr" presetSubtype="0" fill="hold" grpId="0" nodeType="afterEffect">
+                                  <p:stCondLst>
+                                    <p:cond delay="0"/>
+                                  </p:stCondLst>
+                                  <p:childTnLst>
+                                    <p:set>
+                                      <p:cBhvr>
+                                        <p:cTn id="12" dur="1" fill="hold">
+                                          <p:stCondLst>
+                                            <p:cond delay="0"/>
+                                          </p:stCondLst>
+                                        </p:cTn>
+                                        <p:tgtEl>
+                                          <p:spTgt spid="6"/>
+                                        </p:tgtEl>
+                                        <p:attrNameLst>
+                                          <p:attrName>style.visibility</p:attrName>
+                                        </p:attrNameLst>
+                                      </p:cBhvr>
+                                      <p:to>
+                                        <p:strVal val="visible"/>
+                                      </p:to>
+                                    </p:set>
+                                    <p:animEffect transition="in" filter="fade">
+                                      <p:cBhvr>
+                                        <p:cTn id="13" dur="500"/>
+                                        <p:tgtEl>
+                                          <p:spTgt spid="6"/>
+                                        </p:tgtEl>
+                                      </p:cBhvr>
+                                    </p:animEffect>
+                                  </p:childTnLst>
+                                </p:cTn>
+                              </p:par>
+                            </p:childTnLst>
+                          </p:cTn>
+                        </p:par>
+                      </p:childTnLst>
+                    </p:cTn>
+                  </p:par>
+                </p:childTnLst>
+              </p:cTn>
+              <p:prevCondLst>
+                <p:cond evt="onPrev" delay="0">
+                  <p:tgtEl>
+                    <p:sldTgt/>
+                  </p:tgtEl>
+                </p:cond>
+              </p:prevCondLst>
+              <p:nextCondLst>
+                <p:cond evt="onNext" delay="0">
+                  <p:tgtEl>
+                    <p:sldTgt/>
+                  </p:tgtEl>
+                </p:cond>
+              </p:nextCondLst>
+            </p:seq>
+          </p:childTnLst>
+        </p:cTn>
+      </p:par>
+    </p:tnLst>
+    <p:bldLst>
+      <p:bldP spid="5" grpId="0" animBg="1"/>
+      <p:bldP spid="6" grpId="0" animBg="1"/>
+    </p:bldLst>
+  </p:timing>
 </p:sld>
 </file>
 
@@ -3959,7 +4357,7 @@
                 <a:ea typeface="微軟正黑體"/>
                 <a:cs typeface="微軟正黑體"/>
               </a:rPr>
-              <a:t>透鏡快問＋放大鏡偵探（含影片）</a:t>
+              <a:t>影片：放大鏡對著太陽</a:t>
             </a:r>
           </a:p>
         </p:txBody>
@@ -4055,7 +4453,7 @@
                 <a:ea typeface="微軟正黑體"/>
                 <a:cs typeface="微軟正黑體"/>
               </a:rPr>
-              <a:t>放大鏡尋寶</a:t>
+              <a:t>透鏡快問＋放大鏡偵探</a:t>
             </a:r>
           </a:p>
         </p:txBody>
@@ -4151,6 +4549,102 @@
                 <a:ea typeface="微軟正黑體"/>
                 <a:cs typeface="微軟正黑體"/>
               </a:rPr>
+              <a:t>放大鏡尋寶</a:t>
+            </a:r>
+          </a:p>
+        </p:txBody>
+      </p:sp>
+      <p:sp>
+        <p:nvSpPr>
+          <p:cNvPr id="15" name="Oval 14"/>
+          <p:cNvSpPr/>
+          <p:nvPr/>
+        </p:nvSpPr>
+        <p:spPr>
+          <a:xfrm>
+            <a:off x="685800" y="5385816"/>
+            <a:ext cx="457200" cy="457200"/>
+          </a:xfrm>
+          <a:prstGeom prst="ellipse">
+            <a:avLst/>
+          </a:prstGeom>
+          <a:solidFill>
+            <a:srgbClr val="1F2A37"/>
+          </a:solidFill>
+          <a:ln>
+            <a:noFill/>
+          </a:ln>
+          <a:effectLst/>
+        </p:spPr>
+        <p:style>
+          <a:lnRef idx="1">
+            <a:schemeClr val="accent1"/>
+          </a:lnRef>
+          <a:fillRef idx="3">
+            <a:schemeClr val="accent1"/>
+          </a:fillRef>
+          <a:effectRef idx="2">
+            <a:schemeClr val="accent1"/>
+          </a:effectRef>
+          <a:fontRef idx="minor">
+            <a:schemeClr val="lt1"/>
+          </a:fontRef>
+        </p:style>
+        <p:txBody>
+          <a:bodyPr rtlCol="0" anchor="ctr" lIns="0" rIns="0" tIns="0" bIns="0"/>
+          <a:lstStyle/>
+          <a:p>
+            <a:pPr algn="ctr"/>
+            <a:r>
+              <a:rPr sz="1800" b="1">
+                <a:solidFill>
+                  <a:srgbClr val="FFFFFF"/>
+                </a:solidFill>
+                <a:latin typeface="微軟正黑體"/>
+                <a:ea typeface="微軟正黑體"/>
+                <a:cs typeface="微軟正黑體"/>
+              </a:rPr>
+              <a:t>5</a:t>
+            </a:r>
+          </a:p>
+        </p:txBody>
+      </p:sp>
+      <p:sp>
+        <p:nvSpPr>
+          <p:cNvPr id="16" name="TextBox 15"/>
+          <p:cNvSpPr txBox="1"/>
+          <p:nvPr/>
+        </p:nvSpPr>
+        <p:spPr>
+          <a:xfrm>
+            <a:off x="1325880" y="5340096"/>
+            <a:ext cx="4937760" cy="548640"/>
+          </a:xfrm>
+          <a:prstGeom prst="rect">
+            <a:avLst/>
+          </a:prstGeom>
+          <a:noFill/>
+        </p:spPr>
+        <p:txBody>
+          <a:bodyPr wrap="square" anchor="t" lIns="45720" rIns="45720">
+            <a:spAutoFit/>
+          </a:bodyPr>
+          <a:lstStyle/>
+          <a:p>
+            <a:pPr algn="l">
+              <a:lnSpc>
+                <a:spcPct val="112000"/>
+              </a:lnSpc>
+            </a:pPr>
+            <a:r>
+              <a:rPr sz="2400" b="1">
+                <a:solidFill>
+                  <a:srgbClr val="1F2A37"/>
+                </a:solidFill>
+                <a:latin typeface="微軟正黑體"/>
+                <a:ea typeface="微軟正黑體"/>
+                <a:cs typeface="微軟正黑體"/>
+              </a:rPr>
               <a:t>折射環島搶答</a:t>
             </a:r>
           </a:p>
@@ -4158,7 +4652,7 @@
       </p:sp>
       <p:sp>
         <p:nvSpPr>
-          <p:cNvPr id="15" name="TextBox 14"/>
+          <p:cNvPr id="17" name="TextBox 16"/>
           <p:cNvSpPr txBox="1"/>
           <p:nvPr/>
         </p:nvSpPr>
@@ -4199,7 +4693,7 @@
       </p:sp>
       <p:sp>
         <p:nvSpPr>
-          <p:cNvPr id="16" name="Rectangle 15"/>
+          <p:cNvPr id="18" name="Rectangle 17"/>
           <p:cNvSpPr/>
           <p:nvPr/>
         </p:nvSpPr>
@@ -4245,7 +4739,7 @@
       </p:sp>
       <p:sp>
         <p:nvSpPr>
-          <p:cNvPr id="17" name="Rectangle 16"/>
+          <p:cNvPr id="19" name="Rectangle 18"/>
           <p:cNvSpPr/>
           <p:nvPr/>
         </p:nvSpPr>
@@ -4289,7 +4783,7 @@
       </p:sp>
       <p:pic>
         <p:nvPicPr>
-          <p:cNvPr id="18" name="Picture 17" descr="treasure.jpg"/>
+          <p:cNvPr id="20" name="Picture 19" descr="treasure.jpg"/>
           <p:cNvPicPr>
             <a:picLocks noChangeAspect="1"/>
           </p:cNvPicPr>
@@ -4401,7 +4895,7 @@
                                           </p:stCondLst>
                                         </p:cTn>
                                         <p:tgtEl>
-                                          <p:spTgt spid="16"/>
+                                          <p:spTgt spid="18"/>
                                         </p:tgtEl>
                                         <p:attrNameLst>
                                           <p:attrName>style.visibility</p:attrName>
@@ -4415,7 +4909,7 @@
                                       <p:cBhvr>
                                         <p:cTn id="11" dur="500"/>
                                         <p:tgtEl>
-                                          <p:spTgt spid="16"/>
+                                          <p:spTgt spid="18"/>
                                         </p:tgtEl>
                                       </p:cBhvr>
                                     </p:animEffect>
@@ -4445,7 +4939,7 @@
                                           </p:stCondLst>
                                         </p:cTn>
                                         <p:tgtEl>
-                                          <p:spTgt spid="17"/>
+                                          <p:spTgt spid="19"/>
                                         </p:tgtEl>
                                         <p:attrNameLst>
                                           <p:attrName>style.visibility</p:attrName>
@@ -4459,7 +4953,7 @@
                                       <p:cBhvr>
                                         <p:cTn id="15" dur="500"/>
                                         <p:tgtEl>
-                                          <p:spTgt spid="17"/>
+                                          <p:spTgt spid="19"/>
                                         </p:tgtEl>
                                       </p:cBhvr>
                                     </p:animEffect>
@@ -4489,7 +4983,7 @@
                                           </p:stCondLst>
                                         </p:cTn>
                                         <p:tgtEl>
-                                          <p:spTgt spid="18"/>
+                                          <p:spTgt spid="20"/>
                                         </p:tgtEl>
                                         <p:attrNameLst>
                                           <p:attrName>style.visibility</p:attrName>
@@ -4503,7 +4997,7 @@
                                       <p:cBhvr>
                                         <p:cTn id="19" dur="500"/>
                                         <p:tgtEl>
-                                          <p:spTgt spid="18"/>
+                                          <p:spTgt spid="20"/>
                                         </p:tgtEl>
                                       </p:cBhvr>
                                     </p:animEffect>
@@ -5169,6 +5663,170 @@
                             </p:childTnLst>
                           </p:cTn>
                         </p:par>
+                        <p:par>
+                          <p:cTn id="60" fill="hold">
+                            <p:stCondLst>
+                              <p:cond delay="880"/>
+                            </p:stCondLst>
+                            <p:childTnLst>
+                              <p:par>
+                                <p:cTn id="61" presetID="2" presetClass="entr" presetSubtype="8" fill="hold" decel="100000" grpId="0" nodeType="afterEffect">
+                                  <p:stCondLst>
+                                    <p:cond delay="0"/>
+                                  </p:stCondLst>
+                                  <p:childTnLst>
+                                    <p:set>
+                                      <p:cBhvr>
+                                        <p:cTn id="62" dur="1" fill="hold">
+                                          <p:stCondLst>
+                                            <p:cond delay="0"/>
+                                          </p:stCondLst>
+                                        </p:cTn>
+                                        <p:tgtEl>
+                                          <p:spTgt spid="15"/>
+                                        </p:tgtEl>
+                                        <p:attrNameLst>
+                                          <p:attrName>style.visibility</p:attrName>
+                                        </p:attrNameLst>
+                                      </p:cBhvr>
+                                      <p:to>
+                                        <p:strVal val="visible"/>
+                                      </p:to>
+                                    </p:set>
+                                    <p:anim calcmode="lin" valueType="num">
+                                      <p:cBhvr additive="base">
+                                        <p:cTn id="63" dur="400" fill="hold"/>
+                                        <p:tgtEl>
+                                          <p:spTgt spid="15"/>
+                                        </p:tgtEl>
+                                        <p:attrNameLst>
+                                          <p:attrName>ppt_x</p:attrName>
+                                        </p:attrNameLst>
+                                      </p:cBhvr>
+                                      <p:tavLst>
+                                        <p:tav tm="0">
+                                          <p:val>
+                                            <p:strVal val="0-#ppt_w/2"/>
+                                          </p:val>
+                                        </p:tav>
+                                        <p:tav tm="100000">
+                                          <p:val>
+                                            <p:strVal val="#ppt_x"/>
+                                          </p:val>
+                                        </p:tav>
+                                      </p:tavLst>
+                                    </p:anim>
+                                    <p:anim calcmode="lin" valueType="num">
+                                      <p:cBhvr additive="base">
+                                        <p:cTn id="64" dur="400" fill="hold"/>
+                                        <p:tgtEl>
+                                          <p:spTgt spid="15"/>
+                                        </p:tgtEl>
+                                        <p:attrNameLst>
+                                          <p:attrName>ppt_y</p:attrName>
+                                        </p:attrNameLst>
+                                      </p:cBhvr>
+                                      <p:tavLst>
+                                        <p:tav tm="0">
+                                          <p:val>
+                                            <p:strVal val="#ppt_y"/>
+                                          </p:val>
+                                        </p:tav>
+                                        <p:tav tm="100000">
+                                          <p:val>
+                                            <p:strVal val="#ppt_y"/>
+                                          </p:val>
+                                        </p:tav>
+                                      </p:tavLst>
+                                    </p:anim>
+                                  </p:childTnLst>
+                                </p:cTn>
+                              </p:par>
+                            </p:childTnLst>
+                          </p:cTn>
+                        </p:par>
+                        <p:par>
+                          <p:cTn id="65" fill="hold">
+                            <p:stCondLst>
+                              <p:cond delay="880"/>
+                            </p:stCondLst>
+                            <p:childTnLst>
+                              <p:par>
+                                <p:cTn id="66" presetID="2" presetClass="entr" presetSubtype="8" fill="hold" decel="100000" grpId="0" nodeType="afterEffect">
+                                  <p:stCondLst>
+                                    <p:cond delay="0"/>
+                                  </p:stCondLst>
+                                  <p:childTnLst>
+                                    <p:set>
+                                      <p:cBhvr>
+                                        <p:cTn id="67" dur="1" fill="hold">
+                                          <p:stCondLst>
+                                            <p:cond delay="0"/>
+                                          </p:stCondLst>
+                                        </p:cTn>
+                                        <p:tgtEl>
+                                          <p:spTgt spid="16"/>
+                                        </p:tgtEl>
+                                        <p:attrNameLst>
+                                          <p:attrName>style.visibility</p:attrName>
+                                        </p:attrNameLst>
+                                      </p:cBhvr>
+                                      <p:to>
+                                        <p:strVal val="visible"/>
+                                      </p:to>
+                                    </p:set>
+                                    <p:anim calcmode="lin" valueType="num">
+                                      <p:cBhvr additive="base">
+                                        <p:cTn id="68" dur="400" fill="hold"/>
+                                        <p:tgtEl>
+                                          <p:spTgt spid="16"/>
+                                        </p:tgtEl>
+                                        <p:attrNameLst>
+                                          <p:attrName>ppt_x</p:attrName>
+                                        </p:attrNameLst>
+                                      </p:cBhvr>
+                                      <p:tavLst>
+                                        <p:tav tm="0">
+                                          <p:val>
+                                            <p:strVal val="0-#ppt_w/2"/>
+                                          </p:val>
+                                        </p:tav>
+                                        <p:tav tm="100000">
+                                          <p:val>
+                                            <p:strVal val="#ppt_x"/>
+                                          </p:val>
+                                        </p:tav>
+                                      </p:tavLst>
+                                    </p:anim>
+                                    <p:anim calcmode="lin" valueType="num">
+                                      <p:cBhvr additive="base">
+                                        <p:cTn id="69" dur="400" fill="hold"/>
+                                        <p:tgtEl>
+                                          <p:spTgt spid="16"/>
+                                        </p:tgtEl>
+                                        <p:attrNameLst>
+                                          <p:attrName>ppt_y</p:attrName>
+                                        </p:attrNameLst>
+                                      </p:cBhvr>
+                                      <p:tavLst>
+                                        <p:tav tm="0">
+                                          <p:val>
+                                            <p:strVal val="#ppt_y"/>
+                                          </p:val>
+                                        </p:tav>
+                                        <p:tav tm="100000">
+                                          <p:val>
+                                            <p:strVal val="#ppt_y"/>
+                                          </p:val>
+                                        </p:tav>
+                                      </p:tavLst>
+                                    </p:anim>
+                                  </p:childTnLst>
+                                </p:cTn>
+                              </p:par>
+                            </p:childTnLst>
+                          </p:cTn>
+                        </p:par>
                       </p:childTnLst>
                     </p:cTn>
                   </p:par>
@@ -5203,8 +5861,10 @@
       <p:bldP spid="12" grpId="0" animBg="1"/>
       <p:bldP spid="13" grpId="0" animBg="1"/>
       <p:bldP spid="14" grpId="0" animBg="1"/>
+      <p:bldP spid="15" grpId="0" animBg="1"/>
       <p:bldP spid="16" grpId="0" animBg="1"/>
-      <p:bldP spid="17" grpId="0" animBg="1"/>
+      <p:bldP spid="18" grpId="0" animBg="1"/>
+      <p:bldP spid="19" grpId="0" animBg="1"/>
     </p:bldLst>
   </p:timing>
 </p:sld>
@@ -5769,6 +6429,599 @@
 </file>
 
 <file path=ppt/slides/slide4.xml><?xml version="1.0" encoding="utf-8"?>
+<p:sld xmlns:a="http://schemas.openxmlformats.org/drawingml/2006/main" xmlns:p="http://schemas.openxmlformats.org/presentationml/2006/main" xmlns:r="http://schemas.openxmlformats.org/officeDocument/2006/relationships">
+  <p:cSld>
+    <p:spTree>
+      <p:nvGrpSpPr>
+        <p:cNvPr id="1" name=""/>
+        <p:cNvGrpSpPr/>
+        <p:nvPr/>
+      </p:nvGrpSpPr>
+      <p:grpSpPr/>
+      <p:sp>
+        <p:nvSpPr>
+          <p:cNvPr id="2" name="Rectangle 1"/>
+          <p:cNvSpPr/>
+          <p:nvPr/>
+        </p:nvSpPr>
+        <p:spPr>
+          <a:xfrm>
+            <a:off x="0" y="0"/>
+            <a:ext cx="12191695" cy="6858000"/>
+          </a:xfrm>
+          <a:prstGeom prst="rect">
+            <a:avLst/>
+          </a:prstGeom>
+          <a:solidFill>
+            <a:srgbClr val="F4EFE6"/>
+          </a:solidFill>
+          <a:ln>
+            <a:noFill/>
+          </a:ln>
+          <a:effectLst/>
+        </p:spPr>
+        <p:style>
+          <a:lnRef idx="1">
+            <a:schemeClr val="accent1"/>
+          </a:lnRef>
+          <a:fillRef idx="3">
+            <a:schemeClr val="accent1"/>
+          </a:fillRef>
+          <a:effectRef idx="2">
+            <a:schemeClr val="accent1"/>
+          </a:effectRef>
+          <a:fontRef idx="minor">
+            <a:schemeClr val="lt1"/>
+          </a:fontRef>
+        </p:style>
+        <p:txBody>
+          <a:bodyPr rtlCol="0" anchor="ctr"/>
+          <a:lstStyle/>
+          <a:p>
+            <a:pPr algn="ctr"/>
+          </a:p>
+        </p:txBody>
+      </p:sp>
+      <p:sp>
+        <p:nvSpPr>
+          <p:cNvPr id="3" name="TextBox 2">
+            <a:hlinkClick action="ppaction://hlinksldjump" r:id="rId2"/>
+          </p:cNvPr>
+          <p:cNvSpPr txBox="1"/>
+          <p:nvPr/>
+        </p:nvSpPr>
+        <p:spPr>
+          <a:xfrm>
+            <a:off x="10728655" y="457200"/>
+            <a:ext cx="914400" cy="411480"/>
+          </a:xfrm>
+          <a:prstGeom prst="rect">
+            <a:avLst/>
+          </a:prstGeom>
+          <a:noFill/>
+        </p:spPr>
+        <p:txBody>
+          <a:bodyPr wrap="square" anchor="t" lIns="45720" rIns="45720">
+            <a:spAutoFit/>
+          </a:bodyPr>
+          <a:lstStyle/>
+          <a:p>
+            <a:pPr algn="r">
+              <a:lnSpc>
+                <a:spcPct val="112000"/>
+              </a:lnSpc>
+            </a:pPr>
+            <a:r>
+              <a:rPr sz="1500" b="0">
+                <a:solidFill>
+                  <a:srgbClr val="5B6673"/>
+                </a:solidFill>
+                <a:latin typeface="微軟正黑體"/>
+                <a:ea typeface="微軟正黑體"/>
+                <a:cs typeface="微軟正黑體"/>
+              </a:rPr>
+              <a:t>目錄</a:t>
+            </a:r>
+          </a:p>
+        </p:txBody>
+      </p:sp>
+      <p:sp>
+        <p:nvSpPr>
+          <p:cNvPr id="4" name="TextBox 3"/>
+          <p:cNvSpPr txBox="1"/>
+          <p:nvPr/>
+        </p:nvSpPr>
+        <p:spPr>
+          <a:xfrm>
+            <a:off x="640080" y="502920"/>
+            <a:ext cx="8229600" cy="411480"/>
+          </a:xfrm>
+          <a:prstGeom prst="rect">
+            <a:avLst/>
+          </a:prstGeom>
+          <a:noFill/>
+        </p:spPr>
+        <p:txBody>
+          <a:bodyPr wrap="square" anchor="t" lIns="45720" rIns="45720">
+            <a:spAutoFit/>
+          </a:bodyPr>
+          <a:lstStyle/>
+          <a:p>
+            <a:pPr algn="l">
+              <a:lnSpc>
+                <a:spcPct val="112000"/>
+              </a:lnSpc>
+            </a:pPr>
+            <a:r>
+              <a:rPr sz="1600" b="1">
+                <a:solidFill>
+                  <a:srgbClr val="C8372D"/>
+                </a:solidFill>
+                <a:latin typeface="微軟正黑體"/>
+                <a:ea typeface="微軟正黑體"/>
+                <a:cs typeface="微軟正黑體"/>
+              </a:rPr>
+              <a:t>甲班｜影片時間</a:t>
+            </a:r>
+          </a:p>
+        </p:txBody>
+      </p:sp>
+      <p:sp>
+        <p:nvSpPr>
+          <p:cNvPr id="5" name="TextBox 4"/>
+          <p:cNvSpPr txBox="1"/>
+          <p:nvPr/>
+        </p:nvSpPr>
+        <p:spPr>
+          <a:xfrm>
+            <a:off x="640080" y="914400"/>
+            <a:ext cx="5120640" cy="1463040"/>
+          </a:xfrm>
+          <a:prstGeom prst="rect">
+            <a:avLst/>
+          </a:prstGeom>
+          <a:noFill/>
+        </p:spPr>
+        <p:txBody>
+          <a:bodyPr wrap="square" anchor="t" lIns="45720" rIns="45720">
+            <a:spAutoFit/>
+          </a:bodyPr>
+          <a:lstStyle/>
+          <a:p>
+            <a:pPr algn="l">
+              <a:lnSpc>
+                <a:spcPct val="112000"/>
+              </a:lnSpc>
+            </a:pPr>
+            <a:r>
+              <a:rPr sz="4400" b="1">
+                <a:solidFill>
+                  <a:srgbClr val="1F2A37"/>
+                </a:solidFill>
+                <a:latin typeface="微軟正黑體"/>
+                <a:ea typeface="微軟正黑體"/>
+                <a:cs typeface="微軟正黑體"/>
+              </a:rPr>
+              <a:t>影片</a:t>
+            </a:r>
+          </a:p>
+          <a:p>
+            <a:pPr algn="l">
+              <a:lnSpc>
+                <a:spcPct val="112000"/>
+              </a:lnSpc>
+            </a:pPr>
+            <a:r>
+              <a:rPr sz="4400" b="1">
+                <a:solidFill>
+                  <a:srgbClr val="1F2A37"/>
+                </a:solidFill>
+                <a:latin typeface="微軟正黑體"/>
+                <a:ea typeface="微軟正黑體"/>
+                <a:cs typeface="微軟正黑體"/>
+              </a:rPr>
+              <a:t>再看一次！</a:t>
+            </a:r>
+          </a:p>
+        </p:txBody>
+      </p:sp>
+      <p:sp>
+        <p:nvSpPr>
+          <p:cNvPr id="6" name="TextBox 5"/>
+          <p:cNvSpPr txBox="1"/>
+          <p:nvPr/>
+        </p:nvSpPr>
+        <p:spPr>
+          <a:xfrm>
+            <a:off x="658368" y="2514600"/>
+            <a:ext cx="5212080" cy="1097280"/>
+          </a:xfrm>
+          <a:prstGeom prst="rect">
+            <a:avLst/>
+          </a:prstGeom>
+          <a:noFill/>
+        </p:spPr>
+        <p:txBody>
+          <a:bodyPr wrap="square" anchor="t" lIns="45720" rIns="45720">
+            <a:spAutoFit/>
+          </a:bodyPr>
+          <a:lstStyle/>
+          <a:p>
+            <a:pPr algn="l">
+              <a:lnSpc>
+                <a:spcPct val="112000"/>
+              </a:lnSpc>
+            </a:pPr>
+            <a:r>
+              <a:rPr sz="2200" b="0">
+                <a:solidFill>
+                  <a:srgbClr val="5B6673"/>
+                </a:solidFill>
+                <a:latin typeface="微軟正黑體"/>
+                <a:ea typeface="微軟正黑體"/>
+                <a:cs typeface="微軟正黑體"/>
+              </a:rPr>
+              <a:t>放大鏡對著太陽，樹葉冒煙了！</a:t>
+            </a:r>
+          </a:p>
+          <a:p>
+            <a:pPr algn="l">
+              <a:lnSpc>
+                <a:spcPct val="112000"/>
+              </a:lnSpc>
+            </a:pPr>
+            <a:r>
+              <a:rPr sz="2200" b="0">
+                <a:solidFill>
+                  <a:srgbClr val="5B6673"/>
+                </a:solidFill>
+                <a:latin typeface="微軟正黑體"/>
+                <a:ea typeface="微軟正黑體"/>
+                <a:cs typeface="微軟正黑體"/>
+              </a:rPr>
+              <a:t>看完問：樹葉為什麼會冒煙？</a:t>
+            </a:r>
+          </a:p>
+          <a:p>
+            <a:pPr algn="l">
+              <a:lnSpc>
+                <a:spcPct val="112000"/>
+              </a:lnSpc>
+            </a:pPr>
+            <a:r>
+              <a:rPr sz="2200" b="0">
+                <a:solidFill>
+                  <a:srgbClr val="5B6673"/>
+                </a:solidFill>
+                <a:latin typeface="微軟正黑體"/>
+                <a:ea typeface="微軟正黑體"/>
+                <a:cs typeface="微軟正黑體"/>
+              </a:rPr>
+              <a:t>⚠ 放大鏡不能對著太陽、不能對著人</a:t>
+            </a:r>
+          </a:p>
+        </p:txBody>
+      </p:sp>
+      <p:sp>
+        <p:nvSpPr>
+          <p:cNvPr id="7" name="Rounded Rectangle 6">
+            <a:hlinkClick r:id="rId3"/>
+          </p:cNvPr>
+          <p:cNvSpPr/>
+          <p:nvPr/>
+        </p:nvSpPr>
+        <p:spPr>
+          <a:xfrm>
+            <a:off x="658368" y="3840480"/>
+            <a:ext cx="3657600" cy="731520"/>
+          </a:xfrm>
+          <a:prstGeom prst="roundRect">
+            <a:avLst>
+              <a:gd name="adj" fmla="val 30000"/>
+            </a:avLst>
+          </a:prstGeom>
+          <a:solidFill>
+            <a:srgbClr val="1F2A37"/>
+          </a:solidFill>
+          <a:ln>
+            <a:noFill/>
+          </a:ln>
+          <a:effectLst/>
+        </p:spPr>
+        <p:style>
+          <a:lnRef idx="1">
+            <a:schemeClr val="accent1"/>
+          </a:lnRef>
+          <a:fillRef idx="3">
+            <a:schemeClr val="accent1"/>
+          </a:fillRef>
+          <a:effectRef idx="2">
+            <a:schemeClr val="accent1"/>
+          </a:effectRef>
+          <a:fontRef idx="minor">
+            <a:schemeClr val="lt1"/>
+          </a:fontRef>
+        </p:style>
+        <p:txBody>
+          <a:bodyPr rtlCol="0" anchor="ctr"/>
+          <a:lstStyle/>
+          <a:p>
+            <a:pPr algn="ctr"/>
+            <a:r>
+              <a:rPr sz="2200" b="1">
+                <a:solidFill>
+                  <a:srgbClr val="FFFFFF"/>
+                </a:solidFill>
+                <a:latin typeface="微軟正黑體"/>
+                <a:ea typeface="微軟正黑體"/>
+                <a:cs typeface="微軟正黑體"/>
+              </a:rPr>
+              <a:t>▶  播放影片</a:t>
+            </a:r>
+          </a:p>
+        </p:txBody>
+      </p:sp>
+      <p:sp>
+        <p:nvSpPr>
+          <p:cNvPr id="8" name="Rounded Rectangle 7"/>
+          <p:cNvSpPr/>
+          <p:nvPr/>
+        </p:nvSpPr>
+        <p:spPr>
+          <a:xfrm>
+            <a:off x="5989320" y="1051560"/>
+            <a:ext cx="5715000" cy="4114800"/>
+          </a:xfrm>
+          <a:prstGeom prst="roundRect">
+            <a:avLst>
+              <a:gd name="adj" fmla="val 6000"/>
+            </a:avLst>
+          </a:prstGeom>
+          <a:solidFill>
+            <a:srgbClr val="22262B"/>
+          </a:solidFill>
+          <a:ln>
+            <a:noFill/>
+          </a:ln>
+          <a:effectLst/>
+        </p:spPr>
+        <p:style>
+          <a:lnRef idx="1">
+            <a:schemeClr val="accent1"/>
+          </a:lnRef>
+          <a:fillRef idx="3">
+            <a:schemeClr val="accent1"/>
+          </a:fillRef>
+          <a:effectRef idx="2">
+            <a:schemeClr val="accent1"/>
+          </a:effectRef>
+          <a:fontRef idx="minor">
+            <a:schemeClr val="lt1"/>
+          </a:fontRef>
+        </p:style>
+        <p:txBody>
+          <a:bodyPr rtlCol="0" anchor="ctr"/>
+          <a:lstStyle/>
+          <a:p>
+            <a:pPr algn="ctr"/>
+          </a:p>
+        </p:txBody>
+      </p:sp>
+      <p:pic>
+        <p:nvPicPr>
+          <p:cNvPr id="9" name="Picture 8" descr="v_sun.jpg"/>
+          <p:cNvPicPr>
+            <a:picLocks noChangeAspect="1"/>
+          </p:cNvPicPr>
+          <p:nvPr/>
+        </p:nvPicPr>
+        <p:blipFill>
+          <a:blip r:embed="rId4"/>
+          <a:stretch>
+            <a:fillRect/>
+          </a:stretch>
+        </p:blipFill>
+        <p:spPr>
+          <a:xfrm>
+            <a:off x="6172200" y="1234440"/>
+            <a:ext cx="5349240" cy="3008947"/>
+          </a:xfrm>
+          <a:prstGeom prst="rect">
+            <a:avLst/>
+          </a:prstGeom>
+        </p:spPr>
+      </p:pic>
+      <p:sp>
+        <p:nvSpPr>
+          <p:cNvPr id="10" name="Rectangle 9"/>
+          <p:cNvSpPr/>
+          <p:nvPr/>
+        </p:nvSpPr>
+        <p:spPr>
+          <a:xfrm>
+            <a:off x="8503920" y="5166360"/>
+            <a:ext cx="685800" cy="91440"/>
+          </a:xfrm>
+          <a:prstGeom prst="rect">
+            <a:avLst/>
+          </a:prstGeom>
+          <a:solidFill>
+            <a:srgbClr val="22262B"/>
+          </a:solidFill>
+          <a:ln>
+            <a:noFill/>
+          </a:ln>
+          <a:effectLst/>
+        </p:spPr>
+        <p:style>
+          <a:lnRef idx="1">
+            <a:schemeClr val="accent1"/>
+          </a:lnRef>
+          <a:fillRef idx="3">
+            <a:schemeClr val="accent1"/>
+          </a:fillRef>
+          <a:effectRef idx="2">
+            <a:schemeClr val="accent1"/>
+          </a:effectRef>
+          <a:fontRef idx="minor">
+            <a:schemeClr val="lt1"/>
+          </a:fontRef>
+        </p:style>
+        <p:txBody>
+          <a:bodyPr rtlCol="0" anchor="ctr"/>
+          <a:lstStyle/>
+          <a:p>
+            <a:pPr algn="ctr"/>
+          </a:p>
+        </p:txBody>
+      </p:sp>
+      <p:sp>
+        <p:nvSpPr>
+          <p:cNvPr id="11" name="Rounded Rectangle 10"/>
+          <p:cNvSpPr/>
+          <p:nvPr/>
+        </p:nvSpPr>
+        <p:spPr>
+          <a:xfrm>
+            <a:off x="7955279" y="5230368"/>
+            <a:ext cx="1783080" cy="109728"/>
+          </a:xfrm>
+          <a:prstGeom prst="roundRect">
+            <a:avLst>
+              <a:gd name="adj" fmla="val 50000"/>
+            </a:avLst>
+          </a:prstGeom>
+          <a:solidFill>
+            <a:srgbClr val="22262B"/>
+          </a:solidFill>
+          <a:ln>
+            <a:noFill/>
+          </a:ln>
+          <a:effectLst/>
+        </p:spPr>
+        <p:style>
+          <a:lnRef idx="1">
+            <a:schemeClr val="accent1"/>
+          </a:lnRef>
+          <a:fillRef idx="3">
+            <a:schemeClr val="accent1"/>
+          </a:fillRef>
+          <a:effectRef idx="2">
+            <a:schemeClr val="accent1"/>
+          </a:effectRef>
+          <a:fontRef idx="minor">
+            <a:schemeClr val="lt1"/>
+          </a:fontRef>
+        </p:style>
+        <p:txBody>
+          <a:bodyPr rtlCol="0" anchor="ctr"/>
+          <a:lstStyle/>
+          <a:p>
+            <a:pPr algn="ctr"/>
+          </a:p>
+        </p:txBody>
+      </p:sp>
+    </p:spTree>
+  </p:cSld>
+  <p:clrMapOvr>
+    <a:masterClrMapping/>
+  </p:clrMapOvr>
+  <p:transition spd="med">
+    <p:fade/>
+  </p:transition>
+  <p:timing>
+    <p:tnLst>
+      <p:par>
+        <p:cTn id="1" dur="indefinite" restart="never" nodeType="tmRoot">
+          <p:childTnLst>
+            <p:seq concurrent="1" nextAc="seek">
+              <p:cTn id="2" dur="indefinite" nodeType="mainSeq">
+                <p:childTnLst>
+                  <p:par>
+                    <p:cTn id="3" fill="hold">
+                      <p:stCondLst>
+                        <p:cond delay="indefinite"/>
+                        <p:cond evt="onBegin" delay="0">
+                          <p:tn val="2"/>
+                        </p:cond>
+                      </p:stCondLst>
+                      <p:childTnLst>
+                        <p:par>
+                          <p:cTn id="4" fill="hold">
+                            <p:stCondLst>
+                              <p:cond delay="0"/>
+                            </p:stCondLst>
+                            <p:childTnLst>
+                              <p:par>
+                                <p:cTn id="5" presetID="10" presetClass="entr" presetSubtype="0" fill="hold" grpId="0" nodeType="afterEffect">
+                                  <p:stCondLst>
+                                    <p:cond delay="0"/>
+                                  </p:stCondLst>
+                                  <p:childTnLst>
+                                    <p:set>
+                                      <p:cBhvr>
+                                        <p:cTn id="6" dur="1" fill="hold">
+                                          <p:stCondLst>
+                                            <p:cond delay="0"/>
+                                          </p:stCondLst>
+                                        </p:cTn>
+                                        <p:tgtEl>
+                                          <p:spTgt spid="7"/>
+                                        </p:tgtEl>
+                                        <p:attrNameLst>
+                                          <p:attrName>style.visibility</p:attrName>
+                                        </p:attrNameLst>
+                                      </p:cBhvr>
+                                      <p:to>
+                                        <p:strVal val="visible"/>
+                                      </p:to>
+                                    </p:set>
+                                    <p:animEffect transition="in" filter="fade">
+                                      <p:cBhvr>
+                                        <p:cTn id="7" dur="400"/>
+                                        <p:tgtEl>
+                                          <p:spTgt spid="7"/>
+                                        </p:tgtEl>
+                                      </p:cBhvr>
+                                    </p:animEffect>
+                                  </p:childTnLst>
+                                </p:cTn>
+                              </p:par>
+                            </p:childTnLst>
+                          </p:cTn>
+                        </p:par>
+                      </p:childTnLst>
+                    </p:cTn>
+                  </p:par>
+                </p:childTnLst>
+              </p:cTn>
+              <p:prevCondLst>
+                <p:cond evt="onPrev" delay="0">
+                  <p:tgtEl>
+                    <p:sldTgt/>
+                  </p:tgtEl>
+                </p:cond>
+              </p:prevCondLst>
+              <p:nextCondLst>
+                <p:cond evt="onNext" delay="0">
+                  <p:tgtEl>
+                    <p:sldTgt/>
+                  </p:tgtEl>
+                </p:cond>
+              </p:nextCondLst>
+            </p:seq>
+          </p:childTnLst>
+        </p:cTn>
+      </p:par>
+    </p:tnLst>
+    <p:bldLst>
+      <p:bldP spid="7" grpId="0" animBg="1"/>
+    </p:bldLst>
+  </p:timing>
+</p:sld>
+</file>
+
+<file path=ppt/slides/slide5.xml><?xml version="1.0" encoding="utf-8"?>
 <p:sld xmlns:a="http://schemas.openxmlformats.org/drawingml/2006/main" xmlns:p="http://schemas.openxmlformats.org/presentationml/2006/main" xmlns:r="http://schemas.openxmlformats.org/officeDocument/2006/relationships">
   <p:cSld>
     <p:spTree>
@@ -6614,7 +7867,7 @@
 </p:sld>
 </file>
 
-<file path=ppt/slides/slide5.xml><?xml version="1.0" encoding="utf-8"?>
+<file path=ppt/slides/slide6.xml><?xml version="1.0" encoding="utf-8"?>
 <p:sld xmlns:a="http://schemas.openxmlformats.org/drawingml/2006/main" xmlns:p="http://schemas.openxmlformats.org/presentationml/2006/main" xmlns:r="http://schemas.openxmlformats.org/officeDocument/2006/relationships">
   <p:cSld>
     <p:spTree>
@@ -6829,7 +8082,7 @@
                 <a:ea typeface="微軟正黑體"/>
                 <a:cs typeface="微軟正黑體"/>
               </a:rPr>
-              <a:t>裡面有 2 支影片（點電視畫面就播放），再先猜後揭曉：字變大？景色倒過來？一直按「下一步」就好。</a:t>
+              <a:t>先猜再揭曉：字變大？景色倒過來？第 7 頁有影片（點電視就播）。</a:t>
             </a:r>
           </a:p>
         </p:txBody>
@@ -7153,7 +8406,7 @@
 </p:sld>
 </file>
 
-<file path=ppt/slides/slide6.xml><?xml version="1.0" encoding="utf-8"?>
+<file path=ppt/slides/slide7.xml><?xml version="1.0" encoding="utf-8"?>
 <p:sld xmlns:a="http://schemas.openxmlformats.org/drawingml/2006/main" xmlns:p="http://schemas.openxmlformats.org/presentationml/2006/main" xmlns:r="http://schemas.openxmlformats.org/officeDocument/2006/relationships">
   <p:cSld>
     <p:spTree>
@@ -8741,7 +9994,7 @@
 </p:sld>
 </file>
 
-<file path=ppt/slides/slide7.xml><?xml version="1.0" encoding="utf-8"?>
+<file path=ppt/slides/slide8.xml><?xml version="1.0" encoding="utf-8"?>
 <p:sld xmlns:a="http://schemas.openxmlformats.org/drawingml/2006/main" xmlns:p="http://schemas.openxmlformats.org/presentationml/2006/main" xmlns:r="http://schemas.openxmlformats.org/officeDocument/2006/relationships">
   <p:cSld>
     <p:spTree>
@@ -9280,7 +10533,7 @@
 </p:sld>
 </file>
 
-<file path=ppt/slides/slide8.xml><?xml version="1.0" encoding="utf-8"?>
+<file path=ppt/slides/slide9.xml><?xml version="1.0" encoding="utf-8"?>
 <p:sld xmlns:a="http://schemas.openxmlformats.org/drawingml/2006/main" xmlns:p="http://schemas.openxmlformats.org/presentationml/2006/main" xmlns:r="http://schemas.openxmlformats.org/officeDocument/2006/relationships">
   <p:cSld>
     <p:spTree>
@@ -10303,403 +11556,6 @@
 </p:sld>
 </file>
 
-<file path=ppt/slides/slide9.xml><?xml version="1.0" encoding="utf-8"?>
-<p:sld xmlns:a="http://schemas.openxmlformats.org/drawingml/2006/main" xmlns:p="http://schemas.openxmlformats.org/presentationml/2006/main" xmlns:r="http://schemas.openxmlformats.org/officeDocument/2006/relationships">
-  <p:cSld>
-    <p:spTree>
-      <p:nvGrpSpPr>
-        <p:cNvPr id="1" name=""/>
-        <p:cNvGrpSpPr/>
-        <p:nvPr/>
-      </p:nvGrpSpPr>
-      <p:grpSpPr/>
-      <p:sp>
-        <p:nvSpPr>
-          <p:cNvPr id="2" name="Rectangle 1"/>
-          <p:cNvSpPr/>
-          <p:nvPr/>
-        </p:nvSpPr>
-        <p:spPr>
-          <a:xfrm>
-            <a:off x="0" y="0"/>
-            <a:ext cx="12191695" cy="6858000"/>
-          </a:xfrm>
-          <a:prstGeom prst="rect">
-            <a:avLst/>
-          </a:prstGeom>
-          <a:solidFill>
-            <a:srgbClr val="0E1620"/>
-          </a:solidFill>
-          <a:ln>
-            <a:noFill/>
-          </a:ln>
-          <a:effectLst/>
-        </p:spPr>
-        <p:style>
-          <a:lnRef idx="1">
-            <a:schemeClr val="accent1"/>
-          </a:lnRef>
-          <a:fillRef idx="3">
-            <a:schemeClr val="accent1"/>
-          </a:fillRef>
-          <a:effectRef idx="2">
-            <a:schemeClr val="accent1"/>
-          </a:effectRef>
-          <a:fontRef idx="minor">
-            <a:schemeClr val="lt1"/>
-          </a:fontRef>
-        </p:style>
-        <p:txBody>
-          <a:bodyPr rtlCol="0" anchor="ctr"/>
-          <a:lstStyle/>
-          <a:p>
-            <a:pPr algn="ctr"/>
-          </a:p>
-        </p:txBody>
-      </p:sp>
-      <p:pic>
-        <p:nvPicPr>
-          <p:cNvPr id="3" name="Picture 2" descr="stage.jpg"/>
-          <p:cNvPicPr>
-            <a:picLocks noChangeAspect="1"/>
-          </p:cNvPicPr>
-          <p:nvPr/>
-        </p:nvPicPr>
-        <p:blipFill>
-          <a:blip r:embed="rId2"/>
-          <a:stretch>
-            <a:fillRect/>
-          </a:stretch>
-        </p:blipFill>
-        <p:spPr>
-          <a:xfrm>
-            <a:off x="0" y="26729"/>
-            <a:ext cx="12191695" cy="6804540"/>
-          </a:xfrm>
-          <a:prstGeom prst="rect">
-            <a:avLst/>
-          </a:prstGeom>
-        </p:spPr>
-      </p:pic>
-      <p:sp>
-        <p:nvSpPr>
-          <p:cNvPr id="4" name="Rectangle 3"/>
-          <p:cNvSpPr/>
-          <p:nvPr/>
-        </p:nvSpPr>
-        <p:spPr>
-          <a:xfrm>
-            <a:off x="0" y="0"/>
-            <a:ext cx="12191695" cy="6858000"/>
-          </a:xfrm>
-          <a:prstGeom prst="rect">
-            <a:avLst/>
-          </a:prstGeom>
-          <a:solidFill>
-            <a:srgbClr val="0E1620">
-              <a:alpha val="45000"/>
-            </a:srgbClr>
-          </a:solidFill>
-          <a:ln>
-            <a:noFill/>
-          </a:ln>
-          <a:effectLst/>
-        </p:spPr>
-        <p:style>
-          <a:lnRef idx="1">
-            <a:schemeClr val="accent1"/>
-          </a:lnRef>
-          <a:fillRef idx="3">
-            <a:schemeClr val="accent1"/>
-          </a:fillRef>
-          <a:effectRef idx="2">
-            <a:schemeClr val="accent1"/>
-          </a:effectRef>
-          <a:fontRef idx="minor">
-            <a:schemeClr val="lt1"/>
-          </a:fontRef>
-        </p:style>
-        <p:txBody>
-          <a:bodyPr rtlCol="0" anchor="ctr"/>
-          <a:lstStyle/>
-          <a:p>
-            <a:pPr algn="ctr"/>
-          </a:p>
-        </p:txBody>
-      </p:sp>
-      <p:sp>
-        <p:nvSpPr>
-          <p:cNvPr id="5" name="TextBox 4"/>
-          <p:cNvSpPr txBox="1"/>
-          <p:nvPr/>
-        </p:nvSpPr>
-        <p:spPr>
-          <a:xfrm>
-            <a:off x="731520" y="2377440"/>
-            <a:ext cx="10058400" cy="1280160"/>
-          </a:xfrm>
-          <a:prstGeom prst="rect">
-            <a:avLst/>
-          </a:prstGeom>
-          <a:noFill/>
-        </p:spPr>
-        <p:txBody>
-          <a:bodyPr wrap="square" anchor="t" lIns="45720" rIns="45720">
-            <a:spAutoFit/>
-          </a:bodyPr>
-          <a:lstStyle/>
-          <a:p>
-            <a:pPr algn="l">
-              <a:lnSpc>
-                <a:spcPct val="112000"/>
-              </a:lnSpc>
-            </a:pPr>
-            <a:r>
-              <a:rPr sz="7200" b="1">
-                <a:solidFill>
-                  <a:srgbClr val="FFFFFF"/>
-                </a:solidFill>
-                <a:latin typeface="微軟正黑體"/>
-                <a:ea typeface="微軟正黑體"/>
-                <a:cs typeface="微軟正黑體"/>
-              </a:rPr>
-              <a:t>下課囉！</a:t>
-            </a:r>
-          </a:p>
-        </p:txBody>
-      </p:sp>
-      <p:sp>
-        <p:nvSpPr>
-          <p:cNvPr id="6" name="TextBox 5"/>
-          <p:cNvSpPr txBox="1"/>
-          <p:nvPr/>
-        </p:nvSpPr>
-        <p:spPr>
-          <a:xfrm>
-            <a:off x="777240" y="3749039"/>
-            <a:ext cx="10058400" cy="731520"/>
-          </a:xfrm>
-          <a:prstGeom prst="rect">
-            <a:avLst/>
-          </a:prstGeom>
-          <a:noFill/>
-        </p:spPr>
-        <p:txBody>
-          <a:bodyPr wrap="square" anchor="t" lIns="45720" rIns="45720">
-            <a:spAutoFit/>
-          </a:bodyPr>
-          <a:lstStyle/>
-          <a:p>
-            <a:pPr algn="l">
-              <a:lnSpc>
-                <a:spcPct val="112000"/>
-              </a:lnSpc>
-            </a:pPr>
-            <a:r>
-              <a:rPr sz="3000" b="0">
-                <a:solidFill>
-                  <a:srgbClr val="FFE9A8"/>
-                </a:solidFill>
-                <a:latin typeface="微軟正黑體"/>
-                <a:ea typeface="微軟正黑體"/>
-                <a:cs typeface="微軟正黑體"/>
-              </a:rPr>
-              <a:t>今天的光線特勤隊，表現超棒。</a:t>
-            </a:r>
-          </a:p>
-        </p:txBody>
-      </p:sp>
-    </p:spTree>
-  </p:cSld>
-  <p:clrMapOvr>
-    <a:masterClrMapping/>
-  </p:clrMapOvr>
-  <p:transition spd="med">
-    <p:fade/>
-  </p:transition>
-  <p:timing>
-    <p:tnLst>
-      <p:par>
-        <p:cTn id="1" dur="indefinite" restart="never" nodeType="tmRoot">
-          <p:childTnLst>
-            <p:seq concurrent="1" nextAc="seek">
-              <p:cTn id="2" dur="indefinite" nodeType="mainSeq">
-                <p:childTnLst>
-                  <p:par>
-                    <p:cTn id="3" fill="hold">
-                      <p:stCondLst>
-                        <p:cond delay="indefinite"/>
-                        <p:cond evt="onBegin" delay="0">
-                          <p:tn val="2"/>
-                        </p:cond>
-                      </p:stCondLst>
-                      <p:childTnLst>
-                        <p:par>
-                          <p:cTn id="4" fill="hold">
-                            <p:stCondLst>
-                              <p:cond delay="0"/>
-                            </p:stCondLst>
-                            <p:childTnLst>
-                              <p:par>
-                                <p:cTn id="5" presetID="53" presetClass="entr" presetSubtype="16" fill="hold" grpId="0" nodeType="afterEffect">
-                                  <p:stCondLst>
-                                    <p:cond delay="0"/>
-                                  </p:stCondLst>
-                                  <p:childTnLst>
-                                    <p:set>
-                                      <p:cBhvr>
-                                        <p:cTn id="6" dur="1" fill="hold">
-                                          <p:stCondLst>
-                                            <p:cond delay="0"/>
-                                          </p:stCondLst>
-                                        </p:cTn>
-                                        <p:tgtEl>
-                                          <p:spTgt spid="5"/>
-                                        </p:tgtEl>
-                                        <p:attrNameLst>
-                                          <p:attrName>style.visibility</p:attrName>
-                                        </p:attrNameLst>
-                                      </p:cBhvr>
-                                      <p:to>
-                                        <p:strVal val="visible"/>
-                                      </p:to>
-                                    </p:set>
-                                    <p:anim calcmode="lin" valueType="num">
-                                      <p:cBhvr additive="base">
-                                        <p:cTn id="7" dur="500" fill="hold"/>
-                                        <p:tgtEl>
-                                          <p:spTgt spid="5"/>
-                                        </p:tgtEl>
-                                        <p:attrNameLst>
-                                          <p:attrName>ppt_w</p:attrName>
-                                        </p:attrNameLst>
-                                      </p:cBhvr>
-                                      <p:tavLst>
-                                        <p:tav tm="0">
-                                          <p:val>
-                                            <p:strVal val="0"/>
-                                          </p:val>
-                                        </p:tav>
-                                        <p:tav tm="100000">
-                                          <p:val>
-                                            <p:strVal val="#ppt_w"/>
-                                          </p:val>
-                                        </p:tav>
-                                      </p:tavLst>
-                                    </p:anim>
-                                    <p:anim calcmode="lin" valueType="num">
-                                      <p:cBhvr additive="base">
-                                        <p:cTn id="8" dur="500" fill="hold"/>
-                                        <p:tgtEl>
-                                          <p:spTgt spid="5"/>
-                                        </p:tgtEl>
-                                        <p:attrNameLst>
-                                          <p:attrName>ppt_h</p:attrName>
-                                        </p:attrNameLst>
-                                      </p:cBhvr>
-                                      <p:tavLst>
-                                        <p:tav tm="0">
-                                          <p:val>
-                                            <p:strVal val="0"/>
-                                          </p:val>
-                                        </p:tav>
-                                        <p:tav tm="100000">
-                                          <p:val>
-                                            <p:strVal val="#ppt_h"/>
-                                          </p:val>
-                                        </p:tav>
-                                      </p:tavLst>
-                                    </p:anim>
-                                    <p:animEffect transition="in" filter="fade">
-                                      <p:cBhvr>
-                                        <p:cTn id="9" dur="500"/>
-                                        <p:tgtEl>
-                                          <p:spTgt spid="5"/>
-                                        </p:tgtEl>
-                                      </p:cBhvr>
-                                    </p:animEffect>
-                                  </p:childTnLst>
-                                </p:cTn>
-                              </p:par>
-                            </p:childTnLst>
-                          </p:cTn>
-                        </p:par>
-                        <p:par>
-                          <p:cTn id="10" fill="hold">
-                            <p:stCondLst>
-                              <p:cond delay="280"/>
-                            </p:stCondLst>
-                            <p:childTnLst>
-                              <p:par>
-                                <p:cTn id="11" presetID="10" presetClass="entr" presetSubtype="0" fill="hold" grpId="0" nodeType="afterEffect">
-                                  <p:stCondLst>
-                                    <p:cond delay="0"/>
-                                  </p:stCondLst>
-                                  <p:childTnLst>
-                                    <p:set>
-                                      <p:cBhvr>
-                                        <p:cTn id="12" dur="1" fill="hold">
-                                          <p:stCondLst>
-                                            <p:cond delay="0"/>
-                                          </p:stCondLst>
-                                        </p:cTn>
-                                        <p:tgtEl>
-                                          <p:spTgt spid="6"/>
-                                        </p:tgtEl>
-                                        <p:attrNameLst>
-                                          <p:attrName>style.visibility</p:attrName>
-                                        </p:attrNameLst>
-                                      </p:cBhvr>
-                                      <p:to>
-                                        <p:strVal val="visible"/>
-                                      </p:to>
-                                    </p:set>
-                                    <p:animEffect transition="in" filter="fade">
-                                      <p:cBhvr>
-                                        <p:cTn id="13" dur="500"/>
-                                        <p:tgtEl>
-                                          <p:spTgt spid="6"/>
-                                        </p:tgtEl>
-                                      </p:cBhvr>
-                                    </p:animEffect>
-                                  </p:childTnLst>
-                                </p:cTn>
-                              </p:par>
-                            </p:childTnLst>
-                          </p:cTn>
-                        </p:par>
-                      </p:childTnLst>
-                    </p:cTn>
-                  </p:par>
-                </p:childTnLst>
-              </p:cTn>
-              <p:prevCondLst>
-                <p:cond evt="onPrev" delay="0">
-                  <p:tgtEl>
-                    <p:sldTgt/>
-                  </p:tgtEl>
-                </p:cond>
-              </p:prevCondLst>
-              <p:nextCondLst>
-                <p:cond evt="onNext" delay="0">
-                  <p:tgtEl>
-                    <p:sldTgt/>
-                  </p:tgtEl>
-                </p:cond>
-              </p:nextCondLst>
-            </p:seq>
-          </p:childTnLst>
-        </p:cTn>
-      </p:par>
-    </p:tnLst>
-    <p:bldLst>
-      <p:bldP spid="5" grpId="0" animBg="1"/>
-      <p:bldP spid="6" grpId="0" animBg="1"/>
-    </p:bldLst>
-  </p:timing>
-</p:sld>
-</file>
-
 <file path=ppt/theme/theme1.xml><?xml version="1.0" encoding="utf-8"?>
 <a:theme xmlns:a="http://schemas.openxmlformats.org/drawingml/2006/main" name="Office Theme">
   <a:themeElements>

--- a/light-refract/1016/slides.pptx
+++ b/light-refract/1016/slides.pptx
@@ -13,8 +13,6 @@
     <p:sldId id="261" r:id="rId12"/>
     <p:sldId id="262" r:id="rId13"/>
     <p:sldId id="263" r:id="rId14"/>
-    <p:sldId id="264" r:id="rId15"/>
-    <p:sldId id="265" r:id="rId16"/>
   </p:sldIdLst>
   <p:sldSz cx="12191695" cy="6858000" type="screen4x3"/>
   <p:notesSz cx="6858000" cy="9144000"/>
@@ -3414,7 +3412,7 @@
                 <a:ea typeface="微軟正黑體"/>
                 <a:cs typeface="微軟正黑體"/>
               </a:rPr>
-              <a:t>1　MV＋影片：太陽聚光</a:t>
+              <a:t>1　MV〈折一下 Snap!〉</a:t>
             </a:r>
           </a:p>
         </p:txBody>
@@ -3455,7 +3453,7 @@
                 <a:ea typeface="微軟正黑體"/>
                 <a:cs typeface="微軟正黑體"/>
               </a:rPr>
-              <a:t>2　透鏡快問＋放大鏡偵探</a:t>
+              <a:t>2　放大鏡偵探（簡報）</a:t>
             </a:r>
           </a:p>
         </p:txBody>
@@ -3496,7 +3494,7 @@
                 <a:ea typeface="微軟正黑體"/>
                 <a:cs typeface="微軟正黑體"/>
               </a:rPr>
-              <a:t>3　放大鏡尋寶</a:t>
+              <a:t>3　放大鏡尋寶單</a:t>
             </a:r>
           </a:p>
         </p:txBody>
@@ -3537,7 +3535,7 @@
                 <a:ea typeface="微軟正黑體"/>
                 <a:cs typeface="微軟正黑體"/>
               </a:rPr>
-              <a:t>4　折射環島搶答</a:t>
+              <a:t>4　折射環島搶答（挑戰）</a:t>
             </a:r>
           </a:p>
         </p:txBody>
@@ -3550,403 +3548,6 @@
   <p:transition spd="med">
     <p:fade/>
   </p:transition>
-</p:sld>
-</file>
-
-<file path=ppt/slides/slide10.xml><?xml version="1.0" encoding="utf-8"?>
-<p:sld xmlns:a="http://schemas.openxmlformats.org/drawingml/2006/main" xmlns:p="http://schemas.openxmlformats.org/presentationml/2006/main" xmlns:r="http://schemas.openxmlformats.org/officeDocument/2006/relationships">
-  <p:cSld>
-    <p:spTree>
-      <p:nvGrpSpPr>
-        <p:cNvPr id="1" name=""/>
-        <p:cNvGrpSpPr/>
-        <p:nvPr/>
-      </p:nvGrpSpPr>
-      <p:grpSpPr/>
-      <p:sp>
-        <p:nvSpPr>
-          <p:cNvPr id="2" name="Rectangle 1"/>
-          <p:cNvSpPr/>
-          <p:nvPr/>
-        </p:nvSpPr>
-        <p:spPr>
-          <a:xfrm>
-            <a:off x="0" y="0"/>
-            <a:ext cx="12191695" cy="6858000"/>
-          </a:xfrm>
-          <a:prstGeom prst="rect">
-            <a:avLst/>
-          </a:prstGeom>
-          <a:solidFill>
-            <a:srgbClr val="0E1620"/>
-          </a:solidFill>
-          <a:ln>
-            <a:noFill/>
-          </a:ln>
-          <a:effectLst/>
-        </p:spPr>
-        <p:style>
-          <a:lnRef idx="1">
-            <a:schemeClr val="accent1"/>
-          </a:lnRef>
-          <a:fillRef idx="3">
-            <a:schemeClr val="accent1"/>
-          </a:fillRef>
-          <a:effectRef idx="2">
-            <a:schemeClr val="accent1"/>
-          </a:effectRef>
-          <a:fontRef idx="minor">
-            <a:schemeClr val="lt1"/>
-          </a:fontRef>
-        </p:style>
-        <p:txBody>
-          <a:bodyPr rtlCol="0" anchor="ctr"/>
-          <a:lstStyle/>
-          <a:p>
-            <a:pPr algn="ctr"/>
-          </a:p>
-        </p:txBody>
-      </p:sp>
-      <p:pic>
-        <p:nvPicPr>
-          <p:cNvPr id="3" name="Picture 2" descr="stage.jpg"/>
-          <p:cNvPicPr>
-            <a:picLocks noChangeAspect="1"/>
-          </p:cNvPicPr>
-          <p:nvPr/>
-        </p:nvPicPr>
-        <p:blipFill>
-          <a:blip r:embed="rId2"/>
-          <a:stretch>
-            <a:fillRect/>
-          </a:stretch>
-        </p:blipFill>
-        <p:spPr>
-          <a:xfrm>
-            <a:off x="0" y="26729"/>
-            <a:ext cx="12191695" cy="6804540"/>
-          </a:xfrm>
-          <a:prstGeom prst="rect">
-            <a:avLst/>
-          </a:prstGeom>
-        </p:spPr>
-      </p:pic>
-      <p:sp>
-        <p:nvSpPr>
-          <p:cNvPr id="4" name="Rectangle 3"/>
-          <p:cNvSpPr/>
-          <p:nvPr/>
-        </p:nvSpPr>
-        <p:spPr>
-          <a:xfrm>
-            <a:off x="0" y="0"/>
-            <a:ext cx="12191695" cy="6858000"/>
-          </a:xfrm>
-          <a:prstGeom prst="rect">
-            <a:avLst/>
-          </a:prstGeom>
-          <a:solidFill>
-            <a:srgbClr val="0E1620">
-              <a:alpha val="45000"/>
-            </a:srgbClr>
-          </a:solidFill>
-          <a:ln>
-            <a:noFill/>
-          </a:ln>
-          <a:effectLst/>
-        </p:spPr>
-        <p:style>
-          <a:lnRef idx="1">
-            <a:schemeClr val="accent1"/>
-          </a:lnRef>
-          <a:fillRef idx="3">
-            <a:schemeClr val="accent1"/>
-          </a:fillRef>
-          <a:effectRef idx="2">
-            <a:schemeClr val="accent1"/>
-          </a:effectRef>
-          <a:fontRef idx="minor">
-            <a:schemeClr val="lt1"/>
-          </a:fontRef>
-        </p:style>
-        <p:txBody>
-          <a:bodyPr rtlCol="0" anchor="ctr"/>
-          <a:lstStyle/>
-          <a:p>
-            <a:pPr algn="ctr"/>
-          </a:p>
-        </p:txBody>
-      </p:sp>
-      <p:sp>
-        <p:nvSpPr>
-          <p:cNvPr id="5" name="TextBox 4"/>
-          <p:cNvSpPr txBox="1"/>
-          <p:nvPr/>
-        </p:nvSpPr>
-        <p:spPr>
-          <a:xfrm>
-            <a:off x="731520" y="2377440"/>
-            <a:ext cx="10058400" cy="1280160"/>
-          </a:xfrm>
-          <a:prstGeom prst="rect">
-            <a:avLst/>
-          </a:prstGeom>
-          <a:noFill/>
-        </p:spPr>
-        <p:txBody>
-          <a:bodyPr wrap="square" anchor="t" lIns="45720" rIns="45720">
-            <a:spAutoFit/>
-          </a:bodyPr>
-          <a:lstStyle/>
-          <a:p>
-            <a:pPr algn="l">
-              <a:lnSpc>
-                <a:spcPct val="112000"/>
-              </a:lnSpc>
-            </a:pPr>
-            <a:r>
-              <a:rPr sz="7200" b="1">
-                <a:solidFill>
-                  <a:srgbClr val="FFFFFF"/>
-                </a:solidFill>
-                <a:latin typeface="微軟正黑體"/>
-                <a:ea typeface="微軟正黑體"/>
-                <a:cs typeface="微軟正黑體"/>
-              </a:rPr>
-              <a:t>下課囉！</a:t>
-            </a:r>
-          </a:p>
-        </p:txBody>
-      </p:sp>
-      <p:sp>
-        <p:nvSpPr>
-          <p:cNvPr id="6" name="TextBox 5"/>
-          <p:cNvSpPr txBox="1"/>
-          <p:nvPr/>
-        </p:nvSpPr>
-        <p:spPr>
-          <a:xfrm>
-            <a:off x="777240" y="3749039"/>
-            <a:ext cx="10058400" cy="731520"/>
-          </a:xfrm>
-          <a:prstGeom prst="rect">
-            <a:avLst/>
-          </a:prstGeom>
-          <a:noFill/>
-        </p:spPr>
-        <p:txBody>
-          <a:bodyPr wrap="square" anchor="t" lIns="45720" rIns="45720">
-            <a:spAutoFit/>
-          </a:bodyPr>
-          <a:lstStyle/>
-          <a:p>
-            <a:pPr algn="l">
-              <a:lnSpc>
-                <a:spcPct val="112000"/>
-              </a:lnSpc>
-            </a:pPr>
-            <a:r>
-              <a:rPr sz="3000" b="0">
-                <a:solidFill>
-                  <a:srgbClr val="FFE9A8"/>
-                </a:solidFill>
-                <a:latin typeface="微軟正黑體"/>
-                <a:ea typeface="微軟正黑體"/>
-                <a:cs typeface="微軟正黑體"/>
-              </a:rPr>
-              <a:t>今天的光線特勤隊，表現超棒。</a:t>
-            </a:r>
-          </a:p>
-        </p:txBody>
-      </p:sp>
-    </p:spTree>
-  </p:cSld>
-  <p:clrMapOvr>
-    <a:masterClrMapping/>
-  </p:clrMapOvr>
-  <p:transition spd="med">
-    <p:fade/>
-  </p:transition>
-  <p:timing>
-    <p:tnLst>
-      <p:par>
-        <p:cTn id="1" dur="indefinite" restart="never" nodeType="tmRoot">
-          <p:childTnLst>
-            <p:seq concurrent="1" nextAc="seek">
-              <p:cTn id="2" dur="indefinite" nodeType="mainSeq">
-                <p:childTnLst>
-                  <p:par>
-                    <p:cTn id="3" fill="hold">
-                      <p:stCondLst>
-                        <p:cond delay="indefinite"/>
-                        <p:cond evt="onBegin" delay="0">
-                          <p:tn val="2"/>
-                        </p:cond>
-                      </p:stCondLst>
-                      <p:childTnLst>
-                        <p:par>
-                          <p:cTn id="4" fill="hold">
-                            <p:stCondLst>
-                              <p:cond delay="0"/>
-                            </p:stCondLst>
-                            <p:childTnLst>
-                              <p:par>
-                                <p:cTn id="5" presetID="53" presetClass="entr" presetSubtype="16" fill="hold" grpId="0" nodeType="afterEffect">
-                                  <p:stCondLst>
-                                    <p:cond delay="0"/>
-                                  </p:stCondLst>
-                                  <p:childTnLst>
-                                    <p:set>
-                                      <p:cBhvr>
-                                        <p:cTn id="6" dur="1" fill="hold">
-                                          <p:stCondLst>
-                                            <p:cond delay="0"/>
-                                          </p:stCondLst>
-                                        </p:cTn>
-                                        <p:tgtEl>
-                                          <p:spTgt spid="5"/>
-                                        </p:tgtEl>
-                                        <p:attrNameLst>
-                                          <p:attrName>style.visibility</p:attrName>
-                                        </p:attrNameLst>
-                                      </p:cBhvr>
-                                      <p:to>
-                                        <p:strVal val="visible"/>
-                                      </p:to>
-                                    </p:set>
-                                    <p:anim calcmode="lin" valueType="num">
-                                      <p:cBhvr additive="base">
-                                        <p:cTn id="7" dur="500" fill="hold"/>
-                                        <p:tgtEl>
-                                          <p:spTgt spid="5"/>
-                                        </p:tgtEl>
-                                        <p:attrNameLst>
-                                          <p:attrName>ppt_w</p:attrName>
-                                        </p:attrNameLst>
-                                      </p:cBhvr>
-                                      <p:tavLst>
-                                        <p:tav tm="0">
-                                          <p:val>
-                                            <p:strVal val="0"/>
-                                          </p:val>
-                                        </p:tav>
-                                        <p:tav tm="100000">
-                                          <p:val>
-                                            <p:strVal val="#ppt_w"/>
-                                          </p:val>
-                                        </p:tav>
-                                      </p:tavLst>
-                                    </p:anim>
-                                    <p:anim calcmode="lin" valueType="num">
-                                      <p:cBhvr additive="base">
-                                        <p:cTn id="8" dur="500" fill="hold"/>
-                                        <p:tgtEl>
-                                          <p:spTgt spid="5"/>
-                                        </p:tgtEl>
-                                        <p:attrNameLst>
-                                          <p:attrName>ppt_h</p:attrName>
-                                        </p:attrNameLst>
-                                      </p:cBhvr>
-                                      <p:tavLst>
-                                        <p:tav tm="0">
-                                          <p:val>
-                                            <p:strVal val="0"/>
-                                          </p:val>
-                                        </p:tav>
-                                        <p:tav tm="100000">
-                                          <p:val>
-                                            <p:strVal val="#ppt_h"/>
-                                          </p:val>
-                                        </p:tav>
-                                      </p:tavLst>
-                                    </p:anim>
-                                    <p:animEffect transition="in" filter="fade">
-                                      <p:cBhvr>
-                                        <p:cTn id="9" dur="500"/>
-                                        <p:tgtEl>
-                                          <p:spTgt spid="5"/>
-                                        </p:tgtEl>
-                                      </p:cBhvr>
-                                    </p:animEffect>
-                                  </p:childTnLst>
-                                </p:cTn>
-                              </p:par>
-                            </p:childTnLst>
-                          </p:cTn>
-                        </p:par>
-                        <p:par>
-                          <p:cTn id="10" fill="hold">
-                            <p:stCondLst>
-                              <p:cond delay="280"/>
-                            </p:stCondLst>
-                            <p:childTnLst>
-                              <p:par>
-                                <p:cTn id="11" presetID="10" presetClass="entr" presetSubtype="0" fill="hold" grpId="0" nodeType="afterEffect">
-                                  <p:stCondLst>
-                                    <p:cond delay="0"/>
-                                  </p:stCondLst>
-                                  <p:childTnLst>
-                                    <p:set>
-                                      <p:cBhvr>
-                                        <p:cTn id="12" dur="1" fill="hold">
-                                          <p:stCondLst>
-                                            <p:cond delay="0"/>
-                                          </p:stCondLst>
-                                        </p:cTn>
-                                        <p:tgtEl>
-                                          <p:spTgt spid="6"/>
-                                        </p:tgtEl>
-                                        <p:attrNameLst>
-                                          <p:attrName>style.visibility</p:attrName>
-                                        </p:attrNameLst>
-                                      </p:cBhvr>
-                                      <p:to>
-                                        <p:strVal val="visible"/>
-                                      </p:to>
-                                    </p:set>
-                                    <p:animEffect transition="in" filter="fade">
-                                      <p:cBhvr>
-                                        <p:cTn id="13" dur="500"/>
-                                        <p:tgtEl>
-                                          <p:spTgt spid="6"/>
-                                        </p:tgtEl>
-                                      </p:cBhvr>
-                                    </p:animEffect>
-                                  </p:childTnLst>
-                                </p:cTn>
-                              </p:par>
-                            </p:childTnLst>
-                          </p:cTn>
-                        </p:par>
-                      </p:childTnLst>
-                    </p:cTn>
-                  </p:par>
-                </p:childTnLst>
-              </p:cTn>
-              <p:prevCondLst>
-                <p:cond evt="onPrev" delay="0">
-                  <p:tgtEl>
-                    <p:sldTgt/>
-                  </p:tgtEl>
-                </p:cond>
-              </p:prevCondLst>
-              <p:nextCondLst>
-                <p:cond evt="onNext" delay="0">
-                  <p:tgtEl>
-                    <p:sldTgt/>
-                  </p:tgtEl>
-                </p:cond>
-              </p:nextCondLst>
-            </p:seq>
-          </p:childTnLst>
-        </p:cTn>
-      </p:par>
-    </p:tnLst>
-    <p:bldLst>
-      <p:bldP spid="5" grpId="0" animBg="1"/>
-      <p:bldP spid="6" grpId="0" animBg="1"/>
-    </p:bldLst>
-  </p:timing>
 </p:sld>
 </file>
 
@@ -4357,7 +3958,7 @@
                 <a:ea typeface="微軟正黑體"/>
                 <a:cs typeface="微軟正黑體"/>
               </a:rPr>
-              <a:t>影片：放大鏡對著太陽</a:t>
+              <a:t>放大鏡偵探（簡報）</a:t>
             </a:r>
           </a:p>
         </p:txBody>
@@ -4453,7 +4054,7 @@
                 <a:ea typeface="微軟正黑體"/>
                 <a:cs typeface="微軟正黑體"/>
               </a:rPr>
-              <a:t>透鏡快問＋放大鏡偵探</a:t>
+              <a:t>放大鏡尋寶單</a:t>
             </a:r>
           </a:p>
         </p:txBody>
@@ -4549,110 +4150,14 @@
                 <a:ea typeface="微軟正黑體"/>
                 <a:cs typeface="微軟正黑體"/>
               </a:rPr>
-              <a:t>放大鏡尋寶</a:t>
-            </a:r>
-          </a:p>
-        </p:txBody>
-      </p:sp>
-      <p:sp>
-        <p:nvSpPr>
-          <p:cNvPr id="15" name="Oval 14"/>
-          <p:cNvSpPr/>
-          <p:nvPr/>
-        </p:nvSpPr>
-        <p:spPr>
-          <a:xfrm>
-            <a:off x="685800" y="5385816"/>
-            <a:ext cx="457200" cy="457200"/>
-          </a:xfrm>
-          <a:prstGeom prst="ellipse">
-            <a:avLst/>
-          </a:prstGeom>
-          <a:solidFill>
-            <a:srgbClr val="1F2A37"/>
-          </a:solidFill>
-          <a:ln>
-            <a:noFill/>
-          </a:ln>
-          <a:effectLst/>
-        </p:spPr>
-        <p:style>
-          <a:lnRef idx="1">
-            <a:schemeClr val="accent1"/>
-          </a:lnRef>
-          <a:fillRef idx="3">
-            <a:schemeClr val="accent1"/>
-          </a:fillRef>
-          <a:effectRef idx="2">
-            <a:schemeClr val="accent1"/>
-          </a:effectRef>
-          <a:fontRef idx="minor">
-            <a:schemeClr val="lt1"/>
-          </a:fontRef>
-        </p:style>
-        <p:txBody>
-          <a:bodyPr rtlCol="0" anchor="ctr" lIns="0" rIns="0" tIns="0" bIns="0"/>
-          <a:lstStyle/>
-          <a:p>
-            <a:pPr algn="ctr"/>
-            <a:r>
-              <a:rPr sz="1800" b="1">
-                <a:solidFill>
-                  <a:srgbClr val="FFFFFF"/>
-                </a:solidFill>
-                <a:latin typeface="微軟正黑體"/>
-                <a:ea typeface="微軟正黑體"/>
-                <a:cs typeface="微軟正黑體"/>
-              </a:rPr>
-              <a:t>5</a:t>
-            </a:r>
-          </a:p>
-        </p:txBody>
-      </p:sp>
-      <p:sp>
-        <p:nvSpPr>
-          <p:cNvPr id="16" name="TextBox 15"/>
-          <p:cNvSpPr txBox="1"/>
-          <p:nvPr/>
-        </p:nvSpPr>
-        <p:spPr>
-          <a:xfrm>
-            <a:off x="1325880" y="5340096"/>
-            <a:ext cx="4937760" cy="548640"/>
-          </a:xfrm>
-          <a:prstGeom prst="rect">
-            <a:avLst/>
-          </a:prstGeom>
-          <a:noFill/>
-        </p:spPr>
-        <p:txBody>
-          <a:bodyPr wrap="square" anchor="t" lIns="45720" rIns="45720">
-            <a:spAutoFit/>
-          </a:bodyPr>
-          <a:lstStyle/>
-          <a:p>
-            <a:pPr algn="l">
-              <a:lnSpc>
-                <a:spcPct val="112000"/>
-              </a:lnSpc>
-            </a:pPr>
-            <a:r>
-              <a:rPr sz="2400" b="1">
-                <a:solidFill>
-                  <a:srgbClr val="1F2A37"/>
-                </a:solidFill>
-                <a:latin typeface="微軟正黑體"/>
-                <a:ea typeface="微軟正黑體"/>
-                <a:cs typeface="微軟正黑體"/>
-              </a:rPr>
-              <a:t>折射環島搶答</a:t>
-            </a:r>
-          </a:p>
-        </p:txBody>
-      </p:sp>
-      <p:sp>
-        <p:nvSpPr>
-          <p:cNvPr id="17" name="TextBox 16"/>
+              <a:t>折射環島搶答（挑戰）</a:t>
+            </a:r>
+          </a:p>
+        </p:txBody>
+      </p:sp>
+      <p:sp>
+        <p:nvSpPr>
+          <p:cNvPr id="15" name="TextBox 14"/>
           <p:cNvSpPr txBox="1"/>
           <p:nvPr/>
         </p:nvSpPr>
@@ -4693,7 +4198,7 @@
       </p:sp>
       <p:sp>
         <p:nvSpPr>
-          <p:cNvPr id="18" name="Rectangle 17"/>
+          <p:cNvPr id="16" name="Rectangle 15"/>
           <p:cNvSpPr/>
           <p:nvPr/>
         </p:nvSpPr>
@@ -4739,7 +4244,7 @@
       </p:sp>
       <p:sp>
         <p:nvSpPr>
-          <p:cNvPr id="19" name="Rectangle 18"/>
+          <p:cNvPr id="17" name="Rectangle 16"/>
           <p:cNvSpPr/>
           <p:nvPr/>
         </p:nvSpPr>
@@ -4783,7 +4288,7 @@
       </p:sp>
       <p:pic>
         <p:nvPicPr>
-          <p:cNvPr id="20" name="Picture 19" descr="treasure.jpg"/>
+          <p:cNvPr id="18" name="Picture 17" descr="treasure.jpg"/>
           <p:cNvPicPr>
             <a:picLocks noChangeAspect="1"/>
           </p:cNvPicPr>
@@ -4895,7 +4400,7 @@
                                           </p:stCondLst>
                                         </p:cTn>
                                         <p:tgtEl>
-                                          <p:spTgt spid="18"/>
+                                          <p:spTgt spid="16"/>
                                         </p:tgtEl>
                                         <p:attrNameLst>
                                           <p:attrName>style.visibility</p:attrName>
@@ -4909,7 +4414,7 @@
                                       <p:cBhvr>
                                         <p:cTn id="11" dur="500"/>
                                         <p:tgtEl>
-                                          <p:spTgt spid="18"/>
+                                          <p:spTgt spid="16"/>
                                         </p:tgtEl>
                                       </p:cBhvr>
                                     </p:animEffect>
@@ -4939,7 +4444,7 @@
                                           </p:stCondLst>
                                         </p:cTn>
                                         <p:tgtEl>
-                                          <p:spTgt spid="19"/>
+                                          <p:spTgt spid="17"/>
                                         </p:tgtEl>
                                         <p:attrNameLst>
                                           <p:attrName>style.visibility</p:attrName>
@@ -4953,7 +4458,7 @@
                                       <p:cBhvr>
                                         <p:cTn id="15" dur="500"/>
                                         <p:tgtEl>
-                                          <p:spTgt spid="19"/>
+                                          <p:spTgt spid="17"/>
                                         </p:tgtEl>
                                       </p:cBhvr>
                                     </p:animEffect>
@@ -4983,7 +4488,7 @@
                                           </p:stCondLst>
                                         </p:cTn>
                                         <p:tgtEl>
-                                          <p:spTgt spid="20"/>
+                                          <p:spTgt spid="18"/>
                                         </p:tgtEl>
                                         <p:attrNameLst>
                                           <p:attrName>style.visibility</p:attrName>
@@ -4997,7 +4502,7 @@
                                       <p:cBhvr>
                                         <p:cTn id="19" dur="500"/>
                                         <p:tgtEl>
-                                          <p:spTgt spid="20"/>
+                                          <p:spTgt spid="18"/>
                                         </p:tgtEl>
                                       </p:cBhvr>
                                     </p:animEffect>
@@ -5663,170 +5168,6 @@
                             </p:childTnLst>
                           </p:cTn>
                         </p:par>
-                        <p:par>
-                          <p:cTn id="60" fill="hold">
-                            <p:stCondLst>
-                              <p:cond delay="880"/>
-                            </p:stCondLst>
-                            <p:childTnLst>
-                              <p:par>
-                                <p:cTn id="61" presetID="2" presetClass="entr" presetSubtype="8" fill="hold" decel="100000" grpId="0" nodeType="afterEffect">
-                                  <p:stCondLst>
-                                    <p:cond delay="0"/>
-                                  </p:stCondLst>
-                                  <p:childTnLst>
-                                    <p:set>
-                                      <p:cBhvr>
-                                        <p:cTn id="62" dur="1" fill="hold">
-                                          <p:stCondLst>
-                                            <p:cond delay="0"/>
-                                          </p:stCondLst>
-                                        </p:cTn>
-                                        <p:tgtEl>
-                                          <p:spTgt spid="15"/>
-                                        </p:tgtEl>
-                                        <p:attrNameLst>
-                                          <p:attrName>style.visibility</p:attrName>
-                                        </p:attrNameLst>
-                                      </p:cBhvr>
-                                      <p:to>
-                                        <p:strVal val="visible"/>
-                                      </p:to>
-                                    </p:set>
-                                    <p:anim calcmode="lin" valueType="num">
-                                      <p:cBhvr additive="base">
-                                        <p:cTn id="63" dur="400" fill="hold"/>
-                                        <p:tgtEl>
-                                          <p:spTgt spid="15"/>
-                                        </p:tgtEl>
-                                        <p:attrNameLst>
-                                          <p:attrName>ppt_x</p:attrName>
-                                        </p:attrNameLst>
-                                      </p:cBhvr>
-                                      <p:tavLst>
-                                        <p:tav tm="0">
-                                          <p:val>
-                                            <p:strVal val="0-#ppt_w/2"/>
-                                          </p:val>
-                                        </p:tav>
-                                        <p:tav tm="100000">
-                                          <p:val>
-                                            <p:strVal val="#ppt_x"/>
-                                          </p:val>
-                                        </p:tav>
-                                      </p:tavLst>
-                                    </p:anim>
-                                    <p:anim calcmode="lin" valueType="num">
-                                      <p:cBhvr additive="base">
-                                        <p:cTn id="64" dur="400" fill="hold"/>
-                                        <p:tgtEl>
-                                          <p:spTgt spid="15"/>
-                                        </p:tgtEl>
-                                        <p:attrNameLst>
-                                          <p:attrName>ppt_y</p:attrName>
-                                        </p:attrNameLst>
-                                      </p:cBhvr>
-                                      <p:tavLst>
-                                        <p:tav tm="0">
-                                          <p:val>
-                                            <p:strVal val="#ppt_y"/>
-                                          </p:val>
-                                        </p:tav>
-                                        <p:tav tm="100000">
-                                          <p:val>
-                                            <p:strVal val="#ppt_y"/>
-                                          </p:val>
-                                        </p:tav>
-                                      </p:tavLst>
-                                    </p:anim>
-                                  </p:childTnLst>
-                                </p:cTn>
-                              </p:par>
-                            </p:childTnLst>
-                          </p:cTn>
-                        </p:par>
-                        <p:par>
-                          <p:cTn id="65" fill="hold">
-                            <p:stCondLst>
-                              <p:cond delay="880"/>
-                            </p:stCondLst>
-                            <p:childTnLst>
-                              <p:par>
-                                <p:cTn id="66" presetID="2" presetClass="entr" presetSubtype="8" fill="hold" decel="100000" grpId="0" nodeType="afterEffect">
-                                  <p:stCondLst>
-                                    <p:cond delay="0"/>
-                                  </p:stCondLst>
-                                  <p:childTnLst>
-                                    <p:set>
-                                      <p:cBhvr>
-                                        <p:cTn id="67" dur="1" fill="hold">
-                                          <p:stCondLst>
-                                            <p:cond delay="0"/>
-                                          </p:stCondLst>
-                                        </p:cTn>
-                                        <p:tgtEl>
-                                          <p:spTgt spid="16"/>
-                                        </p:tgtEl>
-                                        <p:attrNameLst>
-                                          <p:attrName>style.visibility</p:attrName>
-                                        </p:attrNameLst>
-                                      </p:cBhvr>
-                                      <p:to>
-                                        <p:strVal val="visible"/>
-                                      </p:to>
-                                    </p:set>
-                                    <p:anim calcmode="lin" valueType="num">
-                                      <p:cBhvr additive="base">
-                                        <p:cTn id="68" dur="400" fill="hold"/>
-                                        <p:tgtEl>
-                                          <p:spTgt spid="16"/>
-                                        </p:tgtEl>
-                                        <p:attrNameLst>
-                                          <p:attrName>ppt_x</p:attrName>
-                                        </p:attrNameLst>
-                                      </p:cBhvr>
-                                      <p:tavLst>
-                                        <p:tav tm="0">
-                                          <p:val>
-                                            <p:strVal val="0-#ppt_w/2"/>
-                                          </p:val>
-                                        </p:tav>
-                                        <p:tav tm="100000">
-                                          <p:val>
-                                            <p:strVal val="#ppt_x"/>
-                                          </p:val>
-                                        </p:tav>
-                                      </p:tavLst>
-                                    </p:anim>
-                                    <p:anim calcmode="lin" valueType="num">
-                                      <p:cBhvr additive="base">
-                                        <p:cTn id="69" dur="400" fill="hold"/>
-                                        <p:tgtEl>
-                                          <p:spTgt spid="16"/>
-                                        </p:tgtEl>
-                                        <p:attrNameLst>
-                                          <p:attrName>ppt_y</p:attrName>
-                                        </p:attrNameLst>
-                                      </p:cBhvr>
-                                      <p:tavLst>
-                                        <p:tav tm="0">
-                                          <p:val>
-                                            <p:strVal val="#ppt_y"/>
-                                          </p:val>
-                                        </p:tav>
-                                        <p:tav tm="100000">
-                                          <p:val>
-                                            <p:strVal val="#ppt_y"/>
-                                          </p:val>
-                                        </p:tav>
-                                      </p:tavLst>
-                                    </p:anim>
-                                  </p:childTnLst>
-                                </p:cTn>
-                              </p:par>
-                            </p:childTnLst>
-                          </p:cTn>
-                        </p:par>
                       </p:childTnLst>
                     </p:cTn>
                   </p:par>
@@ -5861,10 +5202,8 @@
       <p:bldP spid="12" grpId="0" animBg="1"/>
       <p:bldP spid="13" grpId="0" animBg="1"/>
       <p:bldP spid="14" grpId="0" animBg="1"/>
-      <p:bldP spid="15" grpId="0" animBg="1"/>
       <p:bldP spid="16" grpId="0" animBg="1"/>
-      <p:bldP spid="18" grpId="0" animBg="1"/>
-      <p:bldP spid="19" grpId="0" animBg="1"/>
+      <p:bldP spid="17" grpId="0" animBg="1"/>
     </p:bldLst>
   </p:timing>
 </p:sld>
@@ -6561,7 +5900,7 @@
                 <a:ea typeface="微軟正黑體"/>
                 <a:cs typeface="微軟正黑體"/>
               </a:rPr>
-              <a:t>甲班｜影片時間</a:t>
+              <a:t>甲班｜放大鏡偵探</a:t>
             </a:r>
           </a:p>
         </p:txBody>
@@ -6602,25 +5941,7 @@
                 <a:ea typeface="微軟正黑體"/>
                 <a:cs typeface="微軟正黑體"/>
               </a:rPr>
-              <a:t>影片</a:t>
-            </a:r>
-          </a:p>
-          <a:p>
-            <a:pPr algn="l">
-              <a:lnSpc>
-                <a:spcPct val="112000"/>
-              </a:lnSpc>
-            </a:pPr>
-            <a:r>
-              <a:rPr sz="4400" b="1">
-                <a:solidFill>
-                  <a:srgbClr val="1F2A37"/>
-                </a:solidFill>
-                <a:latin typeface="微軟正黑體"/>
-                <a:ea typeface="微軟正黑體"/>
-                <a:cs typeface="微軟正黑體"/>
-              </a:rPr>
-              <a:t>再看一次！</a:t>
+              <a:t>放大鏡偵探</a:t>
             </a:r>
           </a:p>
         </p:txBody>
@@ -6661,43 +5982,7 @@
                 <a:ea typeface="微軟正黑體"/>
                 <a:cs typeface="微軟正黑體"/>
               </a:rPr>
-              <a:t>放大鏡對著太陽，樹葉冒煙了！</a:t>
-            </a:r>
-          </a:p>
-          <a:p>
-            <a:pPr algn="l">
-              <a:lnSpc>
-                <a:spcPct val="112000"/>
-              </a:lnSpc>
-            </a:pPr>
-            <a:r>
-              <a:rPr sz="2200" b="0">
-                <a:solidFill>
-                  <a:srgbClr val="5B6673"/>
-                </a:solidFill>
-                <a:latin typeface="微軟正黑體"/>
-                <a:ea typeface="微軟正黑體"/>
-                <a:cs typeface="微軟正黑體"/>
-              </a:rPr>
-              <a:t>看完問：樹葉為什麼會冒煙？</a:t>
-            </a:r>
-          </a:p>
-          <a:p>
-            <a:pPr algn="l">
-              <a:lnSpc>
-                <a:spcPct val="112000"/>
-              </a:lnSpc>
-            </a:pPr>
-            <a:r>
-              <a:rPr sz="2200" b="0">
-                <a:solidFill>
-                  <a:srgbClr val="5B6673"/>
-                </a:solidFill>
-                <a:latin typeface="微軟正黑體"/>
-                <a:ea typeface="微軟正黑體"/>
-                <a:cs typeface="微軟正黑體"/>
-              </a:rPr>
-              <a:t>⚠ 放大鏡不能對著太陽、不能對著人</a:t>
+              <a:t>先看影片，再先猜後揭曉：字變大？景色倒過來？一直按「下一步」。</a:t>
             </a:r>
           </a:p>
         </p:txBody>
@@ -6756,7 +6041,7 @@
                 <a:ea typeface="微軟正黑體"/>
                 <a:cs typeface="微軟正黑體"/>
               </a:rPr>
-              <a:t>▶  播放影片</a:t>
+              <a:t>▶  打開簡報</a:t>
             </a:r>
           </a:p>
         </p:txBody>
@@ -6809,7 +6094,7 @@
       </p:sp>
       <p:pic>
         <p:nvPicPr>
-          <p:cNvPr id="9" name="Picture 8" descr="v_sun.jpg"/>
+          <p:cNvPr id="9" name="Picture 8" descr="s_lensshow.png"/>
           <p:cNvPicPr>
             <a:picLocks noChangeAspect="1"/>
           </p:cNvPicPr>
@@ -7022,1391 +6307,6 @@
 </file>
 
 <file path=ppt/slides/slide5.xml><?xml version="1.0" encoding="utf-8"?>
-<p:sld xmlns:a="http://schemas.openxmlformats.org/drawingml/2006/main" xmlns:p="http://schemas.openxmlformats.org/presentationml/2006/main" xmlns:r="http://schemas.openxmlformats.org/officeDocument/2006/relationships">
-  <p:cSld>
-    <p:spTree>
-      <p:nvGrpSpPr>
-        <p:cNvPr id="1" name=""/>
-        <p:cNvGrpSpPr/>
-        <p:nvPr/>
-      </p:nvGrpSpPr>
-      <p:grpSpPr/>
-      <p:sp>
-        <p:nvSpPr>
-          <p:cNvPr id="2" name="Rectangle 1"/>
-          <p:cNvSpPr/>
-          <p:nvPr/>
-        </p:nvSpPr>
-        <p:spPr>
-          <a:xfrm>
-            <a:off x="0" y="0"/>
-            <a:ext cx="12191695" cy="6858000"/>
-          </a:xfrm>
-          <a:prstGeom prst="rect">
-            <a:avLst/>
-          </a:prstGeom>
-          <a:solidFill>
-            <a:srgbClr val="F4EFE6"/>
-          </a:solidFill>
-          <a:ln>
-            <a:noFill/>
-          </a:ln>
-          <a:effectLst/>
-        </p:spPr>
-        <p:style>
-          <a:lnRef idx="1">
-            <a:schemeClr val="accent1"/>
-          </a:lnRef>
-          <a:fillRef idx="3">
-            <a:schemeClr val="accent1"/>
-          </a:fillRef>
-          <a:effectRef idx="2">
-            <a:schemeClr val="accent1"/>
-          </a:effectRef>
-          <a:fontRef idx="minor">
-            <a:schemeClr val="lt1"/>
-          </a:fontRef>
-        </p:style>
-        <p:txBody>
-          <a:bodyPr rtlCol="0" anchor="ctr"/>
-          <a:lstStyle/>
-          <a:p>
-            <a:pPr algn="ctr"/>
-          </a:p>
-        </p:txBody>
-      </p:sp>
-      <p:sp>
-        <p:nvSpPr>
-          <p:cNvPr id="3" name="TextBox 2">
-            <a:hlinkClick action="ppaction://hlinksldjump" r:id="rId2"/>
-          </p:cNvPr>
-          <p:cNvSpPr txBox="1"/>
-          <p:nvPr/>
-        </p:nvSpPr>
-        <p:spPr>
-          <a:xfrm>
-            <a:off x="10728655" y="457200"/>
-            <a:ext cx="914400" cy="411480"/>
-          </a:xfrm>
-          <a:prstGeom prst="rect">
-            <a:avLst/>
-          </a:prstGeom>
-          <a:noFill/>
-        </p:spPr>
-        <p:txBody>
-          <a:bodyPr wrap="square" anchor="t" lIns="45720" rIns="45720">
-            <a:spAutoFit/>
-          </a:bodyPr>
-          <a:lstStyle/>
-          <a:p>
-            <a:pPr algn="r">
-              <a:lnSpc>
-                <a:spcPct val="112000"/>
-              </a:lnSpc>
-            </a:pPr>
-            <a:r>
-              <a:rPr sz="1500" b="0">
-                <a:solidFill>
-                  <a:srgbClr val="5B6673"/>
-                </a:solidFill>
-                <a:latin typeface="微軟正黑體"/>
-                <a:ea typeface="微軟正黑體"/>
-                <a:cs typeface="微軟正黑體"/>
-              </a:rPr>
-              <a:t>目錄</a:t>
-            </a:r>
-          </a:p>
-        </p:txBody>
-      </p:sp>
-      <p:sp>
-        <p:nvSpPr>
-          <p:cNvPr id="4" name="TextBox 3"/>
-          <p:cNvSpPr txBox="1"/>
-          <p:nvPr/>
-        </p:nvSpPr>
-        <p:spPr>
-          <a:xfrm>
-            <a:off x="640080" y="502920"/>
-            <a:ext cx="8229600" cy="411480"/>
-          </a:xfrm>
-          <a:prstGeom prst="rect">
-            <a:avLst/>
-          </a:prstGeom>
-          <a:noFill/>
-        </p:spPr>
-        <p:txBody>
-          <a:bodyPr wrap="square" anchor="t" lIns="45720" rIns="45720">
-            <a:spAutoFit/>
-          </a:bodyPr>
-          <a:lstStyle/>
-          <a:p>
-            <a:pPr algn="l">
-              <a:lnSpc>
-                <a:spcPct val="112000"/>
-              </a:lnSpc>
-            </a:pPr>
-            <a:r>
-              <a:rPr sz="1600" b="1">
-                <a:solidFill>
-                  <a:srgbClr val="C8372D"/>
-                </a:solidFill>
-                <a:latin typeface="微軟正黑體"/>
-                <a:ea typeface="微軟正黑體"/>
-                <a:cs typeface="微軟正黑體"/>
-              </a:rPr>
-              <a:t>甲班｜透鏡快問</a:t>
-            </a:r>
-          </a:p>
-        </p:txBody>
-      </p:sp>
-      <p:sp>
-        <p:nvSpPr>
-          <p:cNvPr id="5" name="TextBox 4"/>
-          <p:cNvSpPr txBox="1"/>
-          <p:nvPr/>
-        </p:nvSpPr>
-        <p:spPr>
-          <a:xfrm>
-            <a:off x="640080" y="914400"/>
-            <a:ext cx="10972800" cy="914400"/>
-          </a:xfrm>
-          <a:prstGeom prst="rect">
-            <a:avLst/>
-          </a:prstGeom>
-          <a:noFill/>
-        </p:spPr>
-        <p:txBody>
-          <a:bodyPr wrap="square" anchor="t" lIns="45720" rIns="45720">
-            <a:spAutoFit/>
-          </a:bodyPr>
-          <a:lstStyle/>
-          <a:p>
-            <a:pPr algn="l">
-              <a:lnSpc>
-                <a:spcPct val="112000"/>
-              </a:lnSpc>
-            </a:pPr>
-            <a:r>
-              <a:rPr sz="4000" b="1">
-                <a:solidFill>
-                  <a:srgbClr val="1F2A37"/>
-                </a:solidFill>
-                <a:latin typeface="微軟正黑體"/>
-                <a:ea typeface="微軟正黑體"/>
-                <a:cs typeface="微軟正黑體"/>
-              </a:rPr>
-              <a:t>放大鏡的鏡片，長什麼樣子？</a:t>
-            </a:r>
-          </a:p>
-        </p:txBody>
-      </p:sp>
-      <p:sp>
-        <p:nvSpPr>
-          <p:cNvPr id="6" name="Rounded Rectangle 5"/>
-          <p:cNvSpPr/>
-          <p:nvPr/>
-        </p:nvSpPr>
-        <p:spPr>
-          <a:xfrm>
-            <a:off x="3657600" y="1783080"/>
-            <a:ext cx="4846320" cy="4114800"/>
-          </a:xfrm>
-          <a:prstGeom prst="roundRect">
-            <a:avLst>
-              <a:gd name="adj" fmla="val 8000"/>
-            </a:avLst>
-          </a:prstGeom>
-          <a:solidFill>
-            <a:srgbClr val="FFFFFF"/>
-          </a:solidFill>
-          <a:ln w="25400">
-            <a:solidFill>
-              <a:srgbClr val="D8CFBF"/>
-            </a:solidFill>
-          </a:ln>
-          <a:effectLst/>
-        </p:spPr>
-        <p:style>
-          <a:lnRef idx="1">
-            <a:schemeClr val="accent1"/>
-          </a:lnRef>
-          <a:fillRef idx="3">
-            <a:schemeClr val="accent1"/>
-          </a:fillRef>
-          <a:effectRef idx="2">
-            <a:schemeClr val="accent1"/>
-          </a:effectRef>
-          <a:fontRef idx="minor">
-            <a:schemeClr val="lt1"/>
-          </a:fontRef>
-        </p:style>
-        <p:txBody>
-          <a:bodyPr rtlCol="0" anchor="ctr"/>
-          <a:lstStyle/>
-          <a:p>
-            <a:pPr algn="ctr"/>
-          </a:p>
-        </p:txBody>
-      </p:sp>
-      <p:sp>
-        <p:nvSpPr>
-          <p:cNvPr id="7" name="Freeform 6"/>
-          <p:cNvSpPr/>
-          <p:nvPr/>
-        </p:nvSpPr>
-        <p:spPr>
-          <a:xfrm>
-            <a:off x="5692140" y="1965960"/>
-            <a:ext cx="777240" cy="3108960"/>
-          </a:xfrm>
-          <a:custGeom>
-            <a:avLst/>
-            <a:gdLst/>
-            <a:ahLst/>
-            <a:cxnLst/>
-            <a:rect l="l" t="t" r="r" b="b"/>
-            <a:pathLst>
-              <a:path w="777240" h="3108960">
-                <a:moveTo>
-                  <a:pt x="470916" y="0"/>
-                </a:moveTo>
-                <a:lnTo>
-                  <a:pt x="519842" y="129540"/>
-                </a:lnTo>
-                <a:lnTo>
-                  <a:pt x="564515" y="259080"/>
-                </a:lnTo>
-                <a:lnTo>
-                  <a:pt x="604932" y="388620"/>
-                </a:lnTo>
-                <a:lnTo>
-                  <a:pt x="641096" y="518160"/>
-                </a:lnTo>
-                <a:lnTo>
-                  <a:pt x="673004" y="647700"/>
-                </a:lnTo>
-                <a:lnTo>
-                  <a:pt x="700659" y="777240"/>
-                </a:lnTo>
-                <a:lnTo>
-                  <a:pt x="724058" y="906780"/>
-                </a:lnTo>
-                <a:lnTo>
-                  <a:pt x="743204" y="1036320"/>
-                </a:lnTo>
-                <a:lnTo>
-                  <a:pt x="758094" y="1165860"/>
-                </a:lnTo>
-                <a:lnTo>
-                  <a:pt x="768731" y="1295400"/>
-                </a:lnTo>
-                <a:lnTo>
-                  <a:pt x="775112" y="1424940"/>
-                </a:lnTo>
-                <a:lnTo>
-                  <a:pt x="777240" y="1554480"/>
-                </a:lnTo>
-                <a:lnTo>
-                  <a:pt x="775112" y="1684020"/>
-                </a:lnTo>
-                <a:lnTo>
-                  <a:pt x="768731" y="1813560"/>
-                </a:lnTo>
-                <a:lnTo>
-                  <a:pt x="758094" y="1943100"/>
-                </a:lnTo>
-                <a:lnTo>
-                  <a:pt x="743204" y="2072640"/>
-                </a:lnTo>
-                <a:lnTo>
-                  <a:pt x="724058" y="2202180"/>
-                </a:lnTo>
-                <a:lnTo>
-                  <a:pt x="700659" y="2331720"/>
-                </a:lnTo>
-                <a:lnTo>
-                  <a:pt x="673004" y="2461260"/>
-                </a:lnTo>
-                <a:lnTo>
-                  <a:pt x="641096" y="2590800"/>
-                </a:lnTo>
-                <a:lnTo>
-                  <a:pt x="604932" y="2720340"/>
-                </a:lnTo>
-                <a:lnTo>
-                  <a:pt x="564515" y="2849880"/>
-                </a:lnTo>
-                <a:lnTo>
-                  <a:pt x="519842" y="2979420"/>
-                </a:lnTo>
-                <a:lnTo>
-                  <a:pt x="470916" y="3108960"/>
-                </a:lnTo>
-                <a:lnTo>
-                  <a:pt x="306324" y="3108960"/>
-                </a:lnTo>
-                <a:lnTo>
-                  <a:pt x="257397" y="2979420"/>
-                </a:lnTo>
-                <a:lnTo>
-                  <a:pt x="212725" y="2849880"/>
-                </a:lnTo>
-                <a:lnTo>
-                  <a:pt x="172307" y="2720340"/>
-                </a:lnTo>
-                <a:lnTo>
-                  <a:pt x="136144" y="2590800"/>
-                </a:lnTo>
-                <a:lnTo>
-                  <a:pt x="104235" y="2461260"/>
-                </a:lnTo>
-                <a:lnTo>
-                  <a:pt x="76581" y="2331720"/>
-                </a:lnTo>
-                <a:lnTo>
-                  <a:pt x="53181" y="2202180"/>
-                </a:lnTo>
-                <a:lnTo>
-                  <a:pt x="34036" y="2072640"/>
-                </a:lnTo>
-                <a:lnTo>
-                  <a:pt x="19145" y="1943100"/>
-                </a:lnTo>
-                <a:lnTo>
-                  <a:pt x="8509" y="1813560"/>
-                </a:lnTo>
-                <a:lnTo>
-                  <a:pt x="2127" y="1684020"/>
-                </a:lnTo>
-                <a:lnTo>
-                  <a:pt x="0" y="1554480"/>
-                </a:lnTo>
-                <a:lnTo>
-                  <a:pt x="2127" y="1424940"/>
-                </a:lnTo>
-                <a:lnTo>
-                  <a:pt x="8509" y="1295400"/>
-                </a:lnTo>
-                <a:lnTo>
-                  <a:pt x="19145" y="1165860"/>
-                </a:lnTo>
-                <a:lnTo>
-                  <a:pt x="34036" y="1036320"/>
-                </a:lnTo>
-                <a:lnTo>
-                  <a:pt x="53181" y="906780"/>
-                </a:lnTo>
-                <a:lnTo>
-                  <a:pt x="76581" y="777240"/>
-                </a:lnTo>
-                <a:lnTo>
-                  <a:pt x="104235" y="647700"/>
-                </a:lnTo>
-                <a:lnTo>
-                  <a:pt x="136144" y="518160"/>
-                </a:lnTo>
-                <a:lnTo>
-                  <a:pt x="172307" y="388620"/>
-                </a:lnTo>
-                <a:lnTo>
-                  <a:pt x="212725" y="259080"/>
-                </a:lnTo>
-                <a:lnTo>
-                  <a:pt x="257397" y="129540"/>
-                </a:lnTo>
-                <a:lnTo>
-                  <a:pt x="306324" y="0"/>
-                </a:lnTo>
-                <a:close/>
-              </a:path>
-            </a:pathLst>
-          </a:custGeom>
-          <a:solidFill>
-            <a:srgbClr val="BFE6F5"/>
-          </a:solidFill>
-          <a:ln w="38100">
-            <a:solidFill>
-              <a:srgbClr val="2A7FB8"/>
-            </a:solidFill>
-          </a:ln>
-          <a:effectLst/>
-        </p:spPr>
-        <p:style>
-          <a:lnRef idx="1">
-            <a:schemeClr val="accent1"/>
-          </a:lnRef>
-          <a:fillRef idx="3">
-            <a:schemeClr val="accent1"/>
-          </a:fillRef>
-          <a:effectRef idx="2">
-            <a:schemeClr val="accent1"/>
-          </a:effectRef>
-          <a:fontRef idx="minor">
-            <a:schemeClr val="lt1"/>
-          </a:fontRef>
-        </p:style>
-        <p:txBody>
-          <a:bodyPr rtlCol="0" anchor="ctr"/>
-          <a:lstStyle/>
-          <a:p>
-            <a:pPr algn="ctr"/>
-          </a:p>
-        </p:txBody>
-      </p:sp>
-      <p:sp>
-        <p:nvSpPr>
-          <p:cNvPr id="8" name="TextBox 7"/>
-          <p:cNvSpPr txBox="1"/>
-          <p:nvPr/>
-        </p:nvSpPr>
-        <p:spPr>
-          <a:xfrm>
-            <a:off x="3657600" y="5257800"/>
-            <a:ext cx="4846320" cy="548640"/>
-          </a:xfrm>
-          <a:prstGeom prst="rect">
-            <a:avLst/>
-          </a:prstGeom>
-          <a:noFill/>
-        </p:spPr>
-        <p:txBody>
-          <a:bodyPr wrap="square" anchor="t" lIns="45720" rIns="45720">
-            <a:spAutoFit/>
-          </a:bodyPr>
-          <a:lstStyle/>
-          <a:p>
-            <a:pPr algn="ctr">
-              <a:lnSpc>
-                <a:spcPct val="112000"/>
-              </a:lnSpc>
-            </a:pPr>
-            <a:r>
-              <a:rPr sz="2400" b="1">
-                <a:solidFill>
-                  <a:srgbClr val="1F2A37"/>
-                </a:solidFill>
-                <a:latin typeface="微軟正黑體"/>
-                <a:ea typeface="微軟正黑體"/>
-                <a:cs typeface="微軟正黑體"/>
-              </a:rPr>
-              <a:t>摸摸看：中間鼓鼓的、比較厚</a:t>
-            </a:r>
-          </a:p>
-        </p:txBody>
-      </p:sp>
-      <p:sp>
-        <p:nvSpPr>
-          <p:cNvPr id="9" name="Rounded Rectangle 8"/>
-          <p:cNvSpPr/>
-          <p:nvPr/>
-        </p:nvSpPr>
-        <p:spPr>
-          <a:xfrm>
-            <a:off x="3611880" y="1737360"/>
-            <a:ext cx="4937759" cy="4206240"/>
-          </a:xfrm>
-          <a:prstGeom prst="roundRect">
-            <a:avLst>
-              <a:gd name="adj" fmla="val 18000"/>
-            </a:avLst>
-          </a:prstGeom>
-          <a:noFill/>
-          <a:ln w="63500">
-            <a:solidFill>
-              <a:srgbClr val="2F8A4C"/>
-            </a:solidFill>
-          </a:ln>
-          <a:effectLst/>
-        </p:spPr>
-        <p:style>
-          <a:lnRef idx="1">
-            <a:schemeClr val="accent1"/>
-          </a:lnRef>
-          <a:fillRef idx="3">
-            <a:schemeClr val="accent1"/>
-          </a:fillRef>
-          <a:effectRef idx="2">
-            <a:schemeClr val="accent1"/>
-          </a:effectRef>
-          <a:fontRef idx="minor">
-            <a:schemeClr val="lt1"/>
-          </a:fontRef>
-        </p:style>
-        <p:txBody>
-          <a:bodyPr rtlCol="0" anchor="ctr"/>
-          <a:lstStyle/>
-          <a:p>
-            <a:pPr algn="ctr"/>
-          </a:p>
-        </p:txBody>
-      </p:sp>
-      <p:sp>
-        <p:nvSpPr>
-          <p:cNvPr id="10" name="Oval 9"/>
-          <p:cNvSpPr/>
-          <p:nvPr/>
-        </p:nvSpPr>
-        <p:spPr>
-          <a:xfrm>
-            <a:off x="8092440" y="1508760"/>
-            <a:ext cx="685800" cy="685800"/>
-          </a:xfrm>
-          <a:prstGeom prst="ellipse">
-            <a:avLst/>
-          </a:prstGeom>
-          <a:solidFill>
-            <a:srgbClr val="2F8A4C"/>
-          </a:solidFill>
-          <a:ln w="38100">
-            <a:solidFill>
-              <a:srgbClr val="FFFFFF"/>
-            </a:solidFill>
-          </a:ln>
-          <a:effectLst/>
-        </p:spPr>
-        <p:style>
-          <a:lnRef idx="1">
-            <a:schemeClr val="accent1"/>
-          </a:lnRef>
-          <a:fillRef idx="3">
-            <a:schemeClr val="accent1"/>
-          </a:fillRef>
-          <a:effectRef idx="2">
-            <a:schemeClr val="accent1"/>
-          </a:effectRef>
-          <a:fontRef idx="minor">
-            <a:schemeClr val="lt1"/>
-          </a:fontRef>
-        </p:style>
-        <p:txBody>
-          <a:bodyPr rtlCol="0" anchor="ctr" lIns="0" rIns="0" tIns="0" bIns="0"/>
-          <a:lstStyle/>
-          <a:p>
-            <a:pPr algn="ctr"/>
-            <a:r>
-              <a:rPr sz="2800" b="1">
-                <a:solidFill>
-                  <a:srgbClr val="FFFFFF"/>
-                </a:solidFill>
-                <a:latin typeface="微軟正黑體"/>
-                <a:ea typeface="微軟正黑體"/>
-                <a:cs typeface="微軟正黑體"/>
-              </a:rPr>
-              <a:t>✓</a:t>
-            </a:r>
-          </a:p>
-        </p:txBody>
-      </p:sp>
-      <p:sp>
-        <p:nvSpPr>
-          <p:cNvPr id="11" name="Rectangle 10"/>
-          <p:cNvSpPr/>
-          <p:nvPr/>
-        </p:nvSpPr>
-        <p:spPr>
-          <a:xfrm>
-            <a:off x="0" y="6263640"/>
-            <a:ext cx="12191695" cy="594360"/>
-          </a:xfrm>
-          <a:prstGeom prst="rect">
-            <a:avLst/>
-          </a:prstGeom>
-          <a:solidFill>
-            <a:srgbClr val="2F8A4C"/>
-          </a:solidFill>
-          <a:ln>
-            <a:noFill/>
-          </a:ln>
-          <a:effectLst/>
-        </p:spPr>
-        <p:style>
-          <a:lnRef idx="1">
-            <a:schemeClr val="accent1"/>
-          </a:lnRef>
-          <a:fillRef idx="3">
-            <a:schemeClr val="accent1"/>
-          </a:fillRef>
-          <a:effectRef idx="2">
-            <a:schemeClr val="accent1"/>
-          </a:effectRef>
-          <a:fontRef idx="minor">
-            <a:schemeClr val="lt1"/>
-          </a:fontRef>
-        </p:style>
-        <p:txBody>
-          <a:bodyPr rtlCol="0" anchor="ctr" wrap="square" lIns="640080" rIns="640080"/>
-          <a:lstStyle/>
-          <a:p>
-            <a:pPr algn="l"/>
-            <a:r>
-              <a:rPr sz="2200" b="1">
-                <a:solidFill>
-                  <a:srgbClr val="FFFFFF"/>
-                </a:solidFill>
-                <a:latin typeface="微軟正黑體"/>
-                <a:ea typeface="微軟正黑體"/>
-                <a:cs typeface="微軟正黑體"/>
-              </a:rPr>
-              <a:t>放大鏡中間厚＝凸透鏡：讓光換方向，東西看起來變大</a:t>
-            </a:r>
-          </a:p>
-        </p:txBody>
-      </p:sp>
-    </p:spTree>
-  </p:cSld>
-  <p:clrMapOvr>
-    <a:masterClrMapping/>
-  </p:clrMapOvr>
-  <p:transition spd="med">
-    <p:fade/>
-  </p:transition>
-  <p:timing>
-    <p:tnLst>
-      <p:par>
-        <p:cTn id="1" dur="indefinite" restart="never" nodeType="tmRoot">
-          <p:childTnLst>
-            <p:seq concurrent="1" nextAc="seek">
-              <p:cTn id="2" dur="indefinite" nodeType="mainSeq">
-                <p:childTnLst>
-                  <p:par>
-                    <p:cTn id="3" fill="hold">
-                      <p:stCondLst>
-                        <p:cond delay="indefinite"/>
-                      </p:stCondLst>
-                      <p:childTnLst>
-                        <p:par>
-                          <p:cTn id="4" fill="hold">
-                            <p:stCondLst>
-                              <p:cond delay="0"/>
-                            </p:stCondLst>
-                            <p:childTnLst>
-                              <p:par>
-                                <p:cTn id="5" presetID="10" presetClass="entr" presetSubtype="0" fill="hold" grpId="0" nodeType="clickEffect">
-                                  <p:stCondLst>
-                                    <p:cond delay="0"/>
-                                  </p:stCondLst>
-                                  <p:childTnLst>
-                                    <p:set>
-                                      <p:cBhvr>
-                                        <p:cTn id="6" dur="1" fill="hold">
-                                          <p:stCondLst>
-                                            <p:cond delay="0"/>
-                                          </p:stCondLst>
-                                        </p:cTn>
-                                        <p:tgtEl>
-                                          <p:spTgt spid="9"/>
-                                        </p:tgtEl>
-                                        <p:attrNameLst>
-                                          <p:attrName>style.visibility</p:attrName>
-                                        </p:attrNameLst>
-                                      </p:cBhvr>
-                                      <p:to>
-                                        <p:strVal val="visible"/>
-                                      </p:to>
-                                    </p:set>
-                                    <p:animEffect transition="in" filter="fade">
-                                      <p:cBhvr>
-                                        <p:cTn id="7" dur="300"/>
-                                        <p:tgtEl>
-                                          <p:spTgt spid="9"/>
-                                        </p:tgtEl>
-                                      </p:cBhvr>
-                                    </p:animEffect>
-                                  </p:childTnLst>
-                                </p:cTn>
-                              </p:par>
-                              <p:par>
-                                <p:cTn id="8" presetID="53" presetClass="entr" presetSubtype="16" fill="hold" grpId="0" nodeType="withEffect">
-                                  <p:stCondLst>
-                                    <p:cond delay="0"/>
-                                  </p:stCondLst>
-                                  <p:childTnLst>
-                                    <p:set>
-                                      <p:cBhvr>
-                                        <p:cTn id="9" dur="1" fill="hold">
-                                          <p:stCondLst>
-                                            <p:cond delay="0"/>
-                                          </p:stCondLst>
-                                        </p:cTn>
-                                        <p:tgtEl>
-                                          <p:spTgt spid="10"/>
-                                        </p:tgtEl>
-                                        <p:attrNameLst>
-                                          <p:attrName>style.visibility</p:attrName>
-                                        </p:attrNameLst>
-                                      </p:cBhvr>
-                                      <p:to>
-                                        <p:strVal val="visible"/>
-                                      </p:to>
-                                    </p:set>
-                                    <p:anim calcmode="lin" valueType="num">
-                                      <p:cBhvr additive="base">
-                                        <p:cTn id="10" dur="400" fill="hold"/>
-                                        <p:tgtEl>
-                                          <p:spTgt spid="10"/>
-                                        </p:tgtEl>
-                                        <p:attrNameLst>
-                                          <p:attrName>ppt_w</p:attrName>
-                                        </p:attrNameLst>
-                                      </p:cBhvr>
-                                      <p:tavLst>
-                                        <p:tav tm="0">
-                                          <p:val>
-                                            <p:strVal val="0"/>
-                                          </p:val>
-                                        </p:tav>
-                                        <p:tav tm="100000">
-                                          <p:val>
-                                            <p:strVal val="#ppt_w"/>
-                                          </p:val>
-                                        </p:tav>
-                                      </p:tavLst>
-                                    </p:anim>
-                                    <p:anim calcmode="lin" valueType="num">
-                                      <p:cBhvr additive="base">
-                                        <p:cTn id="11" dur="400" fill="hold"/>
-                                        <p:tgtEl>
-                                          <p:spTgt spid="10"/>
-                                        </p:tgtEl>
-                                        <p:attrNameLst>
-                                          <p:attrName>ppt_h</p:attrName>
-                                        </p:attrNameLst>
-                                      </p:cBhvr>
-                                      <p:tavLst>
-                                        <p:tav tm="0">
-                                          <p:val>
-                                            <p:strVal val="0"/>
-                                          </p:val>
-                                        </p:tav>
-                                        <p:tav tm="100000">
-                                          <p:val>
-                                            <p:strVal val="#ppt_h"/>
-                                          </p:val>
-                                        </p:tav>
-                                      </p:tavLst>
-                                    </p:anim>
-                                    <p:animEffect transition="in" filter="fade">
-                                      <p:cBhvr>
-                                        <p:cTn id="12" dur="400"/>
-                                        <p:tgtEl>
-                                          <p:spTgt spid="10"/>
-                                        </p:tgtEl>
-                                      </p:cBhvr>
-                                    </p:animEffect>
-                                  </p:childTnLst>
-                                </p:cTn>
-                              </p:par>
-                              <p:par>
-                                <p:cTn id="13" presetID="22" presetClass="entr" presetSubtype="1" fill="hold" grpId="0" nodeType="withEffect">
-                                  <p:stCondLst>
-                                    <p:cond delay="0"/>
-                                  </p:stCondLst>
-                                  <p:childTnLst>
-                                    <p:set>
-                                      <p:cBhvr>
-                                        <p:cTn id="14" dur="1" fill="hold">
-                                          <p:stCondLst>
-                                            <p:cond delay="0"/>
-                                          </p:stCondLst>
-                                        </p:cTn>
-                                        <p:tgtEl>
-                                          <p:spTgt spid="11"/>
-                                        </p:tgtEl>
-                                        <p:attrNameLst>
-                                          <p:attrName>style.visibility</p:attrName>
-                                        </p:attrNameLst>
-                                      </p:cBhvr>
-                                      <p:to>
-                                        <p:strVal val="visible"/>
-                                      </p:to>
-                                    </p:set>
-                                    <p:animEffect transition="in" filter="wipe(up)">
-                                      <p:cBhvr>
-                                        <p:cTn id="15" dur="500"/>
-                                        <p:tgtEl>
-                                          <p:spTgt spid="11"/>
-                                        </p:tgtEl>
-                                      </p:cBhvr>
-                                    </p:animEffect>
-                                  </p:childTnLst>
-                                </p:cTn>
-                              </p:par>
-                            </p:childTnLst>
-                          </p:cTn>
-                        </p:par>
-                      </p:childTnLst>
-                    </p:cTn>
-                  </p:par>
-                </p:childTnLst>
-              </p:cTn>
-              <p:prevCondLst>
-                <p:cond evt="onPrev" delay="0">
-                  <p:tgtEl>
-                    <p:sldTgt/>
-                  </p:tgtEl>
-                </p:cond>
-              </p:prevCondLst>
-              <p:nextCondLst>
-                <p:cond evt="onNext" delay="0">
-                  <p:tgtEl>
-                    <p:sldTgt/>
-                  </p:tgtEl>
-                </p:cond>
-              </p:nextCondLst>
-            </p:seq>
-          </p:childTnLst>
-        </p:cTn>
-      </p:par>
-    </p:tnLst>
-    <p:bldLst>
-      <p:bldP spid="9" grpId="0" animBg="1"/>
-      <p:bldP spid="10" grpId="0" animBg="1"/>
-      <p:bldP spid="11" grpId="0" animBg="1"/>
-    </p:bldLst>
-  </p:timing>
-</p:sld>
-</file>
-
-<file path=ppt/slides/slide6.xml><?xml version="1.0" encoding="utf-8"?>
-<p:sld xmlns:a="http://schemas.openxmlformats.org/drawingml/2006/main" xmlns:p="http://schemas.openxmlformats.org/presentationml/2006/main" xmlns:r="http://schemas.openxmlformats.org/officeDocument/2006/relationships">
-  <p:cSld>
-    <p:spTree>
-      <p:nvGrpSpPr>
-        <p:cNvPr id="1" name=""/>
-        <p:cNvGrpSpPr/>
-        <p:nvPr/>
-      </p:nvGrpSpPr>
-      <p:grpSpPr/>
-      <p:sp>
-        <p:nvSpPr>
-          <p:cNvPr id="2" name="Rectangle 1"/>
-          <p:cNvSpPr/>
-          <p:nvPr/>
-        </p:nvSpPr>
-        <p:spPr>
-          <a:xfrm>
-            <a:off x="0" y="0"/>
-            <a:ext cx="12191695" cy="6858000"/>
-          </a:xfrm>
-          <a:prstGeom prst="rect">
-            <a:avLst/>
-          </a:prstGeom>
-          <a:solidFill>
-            <a:srgbClr val="F4EFE6"/>
-          </a:solidFill>
-          <a:ln>
-            <a:noFill/>
-          </a:ln>
-          <a:effectLst/>
-        </p:spPr>
-        <p:style>
-          <a:lnRef idx="1">
-            <a:schemeClr val="accent1"/>
-          </a:lnRef>
-          <a:fillRef idx="3">
-            <a:schemeClr val="accent1"/>
-          </a:fillRef>
-          <a:effectRef idx="2">
-            <a:schemeClr val="accent1"/>
-          </a:effectRef>
-          <a:fontRef idx="minor">
-            <a:schemeClr val="lt1"/>
-          </a:fontRef>
-        </p:style>
-        <p:txBody>
-          <a:bodyPr rtlCol="0" anchor="ctr"/>
-          <a:lstStyle/>
-          <a:p>
-            <a:pPr algn="ctr"/>
-          </a:p>
-        </p:txBody>
-      </p:sp>
-      <p:sp>
-        <p:nvSpPr>
-          <p:cNvPr id="3" name="TextBox 2">
-            <a:hlinkClick action="ppaction://hlinksldjump" r:id="rId2"/>
-          </p:cNvPr>
-          <p:cNvSpPr txBox="1"/>
-          <p:nvPr/>
-        </p:nvSpPr>
-        <p:spPr>
-          <a:xfrm>
-            <a:off x="10728655" y="457200"/>
-            <a:ext cx="914400" cy="411480"/>
-          </a:xfrm>
-          <a:prstGeom prst="rect">
-            <a:avLst/>
-          </a:prstGeom>
-          <a:noFill/>
-        </p:spPr>
-        <p:txBody>
-          <a:bodyPr wrap="square" anchor="t" lIns="45720" rIns="45720">
-            <a:spAutoFit/>
-          </a:bodyPr>
-          <a:lstStyle/>
-          <a:p>
-            <a:pPr algn="r">
-              <a:lnSpc>
-                <a:spcPct val="112000"/>
-              </a:lnSpc>
-            </a:pPr>
-            <a:r>
-              <a:rPr sz="1500" b="0">
-                <a:solidFill>
-                  <a:srgbClr val="5B6673"/>
-                </a:solidFill>
-                <a:latin typeface="微軟正黑體"/>
-                <a:ea typeface="微軟正黑體"/>
-                <a:cs typeface="微軟正黑體"/>
-              </a:rPr>
-              <a:t>目錄</a:t>
-            </a:r>
-          </a:p>
-        </p:txBody>
-      </p:sp>
-      <p:sp>
-        <p:nvSpPr>
-          <p:cNvPr id="4" name="TextBox 3"/>
-          <p:cNvSpPr txBox="1"/>
-          <p:nvPr/>
-        </p:nvSpPr>
-        <p:spPr>
-          <a:xfrm>
-            <a:off x="640080" y="502920"/>
-            <a:ext cx="8229600" cy="411480"/>
-          </a:xfrm>
-          <a:prstGeom prst="rect">
-            <a:avLst/>
-          </a:prstGeom>
-          <a:noFill/>
-        </p:spPr>
-        <p:txBody>
-          <a:bodyPr wrap="square" anchor="t" lIns="45720" rIns="45720">
-            <a:spAutoFit/>
-          </a:bodyPr>
-          <a:lstStyle/>
-          <a:p>
-            <a:pPr algn="l">
-              <a:lnSpc>
-                <a:spcPct val="112000"/>
-              </a:lnSpc>
-            </a:pPr>
-            <a:r>
-              <a:rPr sz="1600" b="1">
-                <a:solidFill>
-                  <a:srgbClr val="C8372D"/>
-                </a:solidFill>
-                <a:latin typeface="微軟正黑體"/>
-                <a:ea typeface="微軟正黑體"/>
-                <a:cs typeface="微軟正黑體"/>
-              </a:rPr>
-              <a:t>甲班｜放大鏡偵探</a:t>
-            </a:r>
-          </a:p>
-        </p:txBody>
-      </p:sp>
-      <p:sp>
-        <p:nvSpPr>
-          <p:cNvPr id="5" name="TextBox 4"/>
-          <p:cNvSpPr txBox="1"/>
-          <p:nvPr/>
-        </p:nvSpPr>
-        <p:spPr>
-          <a:xfrm>
-            <a:off x="640080" y="914400"/>
-            <a:ext cx="5120640" cy="1463040"/>
-          </a:xfrm>
-          <a:prstGeom prst="rect">
-            <a:avLst/>
-          </a:prstGeom>
-          <a:noFill/>
-        </p:spPr>
-        <p:txBody>
-          <a:bodyPr wrap="square" anchor="t" lIns="45720" rIns="45720">
-            <a:spAutoFit/>
-          </a:bodyPr>
-          <a:lstStyle/>
-          <a:p>
-            <a:pPr algn="l">
-              <a:lnSpc>
-                <a:spcPct val="112000"/>
-              </a:lnSpc>
-            </a:pPr>
-            <a:r>
-              <a:rPr sz="4400" b="1">
-                <a:solidFill>
-                  <a:srgbClr val="1F2A37"/>
-                </a:solidFill>
-                <a:latin typeface="微軟正黑體"/>
-                <a:ea typeface="微軟正黑體"/>
-                <a:cs typeface="微軟正黑體"/>
-              </a:rPr>
-              <a:t>放大鏡偵探</a:t>
-            </a:r>
-          </a:p>
-        </p:txBody>
-      </p:sp>
-      <p:sp>
-        <p:nvSpPr>
-          <p:cNvPr id="6" name="TextBox 5"/>
-          <p:cNvSpPr txBox="1"/>
-          <p:nvPr/>
-        </p:nvSpPr>
-        <p:spPr>
-          <a:xfrm>
-            <a:off x="658368" y="2514600"/>
-            <a:ext cx="5212080" cy="1097280"/>
-          </a:xfrm>
-          <a:prstGeom prst="rect">
-            <a:avLst/>
-          </a:prstGeom>
-          <a:noFill/>
-        </p:spPr>
-        <p:txBody>
-          <a:bodyPr wrap="square" anchor="t" lIns="45720" rIns="45720">
-            <a:spAutoFit/>
-          </a:bodyPr>
-          <a:lstStyle/>
-          <a:p>
-            <a:pPr algn="l">
-              <a:lnSpc>
-                <a:spcPct val="112000"/>
-              </a:lnSpc>
-            </a:pPr>
-            <a:r>
-              <a:rPr sz="2200" b="0">
-                <a:solidFill>
-                  <a:srgbClr val="5B6673"/>
-                </a:solidFill>
-                <a:latin typeface="微軟正黑體"/>
-                <a:ea typeface="微軟正黑體"/>
-                <a:cs typeface="微軟正黑體"/>
-              </a:rPr>
-              <a:t>先猜再揭曉：字變大？景色倒過來？第 7 頁有影片（點電視就播）。</a:t>
-            </a:r>
-          </a:p>
-        </p:txBody>
-      </p:sp>
-      <p:sp>
-        <p:nvSpPr>
-          <p:cNvPr id="7" name="Rounded Rectangle 6">
-            <a:hlinkClick r:id="rId3"/>
-          </p:cNvPr>
-          <p:cNvSpPr/>
-          <p:nvPr/>
-        </p:nvSpPr>
-        <p:spPr>
-          <a:xfrm>
-            <a:off x="658368" y="3840480"/>
-            <a:ext cx="3657600" cy="731520"/>
-          </a:xfrm>
-          <a:prstGeom prst="roundRect">
-            <a:avLst>
-              <a:gd name="adj" fmla="val 30000"/>
-            </a:avLst>
-          </a:prstGeom>
-          <a:solidFill>
-            <a:srgbClr val="1F2A37"/>
-          </a:solidFill>
-          <a:ln>
-            <a:noFill/>
-          </a:ln>
-          <a:effectLst/>
-        </p:spPr>
-        <p:style>
-          <a:lnRef idx="1">
-            <a:schemeClr val="accent1"/>
-          </a:lnRef>
-          <a:fillRef idx="3">
-            <a:schemeClr val="accent1"/>
-          </a:fillRef>
-          <a:effectRef idx="2">
-            <a:schemeClr val="accent1"/>
-          </a:effectRef>
-          <a:fontRef idx="minor">
-            <a:schemeClr val="lt1"/>
-          </a:fontRef>
-        </p:style>
-        <p:txBody>
-          <a:bodyPr rtlCol="0" anchor="ctr"/>
-          <a:lstStyle/>
-          <a:p>
-            <a:pPr algn="ctr"/>
-            <a:r>
-              <a:rPr sz="2200" b="1">
-                <a:solidFill>
-                  <a:srgbClr val="FFFFFF"/>
-                </a:solidFill>
-                <a:latin typeface="微軟正黑體"/>
-                <a:ea typeface="微軟正黑體"/>
-                <a:cs typeface="微軟正黑體"/>
-              </a:rPr>
-              <a:t>▶  打開簡報</a:t>
-            </a:r>
-          </a:p>
-        </p:txBody>
-      </p:sp>
-      <p:sp>
-        <p:nvSpPr>
-          <p:cNvPr id="8" name="Rounded Rectangle 7"/>
-          <p:cNvSpPr/>
-          <p:nvPr/>
-        </p:nvSpPr>
-        <p:spPr>
-          <a:xfrm>
-            <a:off x="5989320" y="1051560"/>
-            <a:ext cx="5715000" cy="4114800"/>
-          </a:xfrm>
-          <a:prstGeom prst="roundRect">
-            <a:avLst>
-              <a:gd name="adj" fmla="val 6000"/>
-            </a:avLst>
-          </a:prstGeom>
-          <a:solidFill>
-            <a:srgbClr val="22262B"/>
-          </a:solidFill>
-          <a:ln>
-            <a:noFill/>
-          </a:ln>
-          <a:effectLst/>
-        </p:spPr>
-        <p:style>
-          <a:lnRef idx="1">
-            <a:schemeClr val="accent1"/>
-          </a:lnRef>
-          <a:fillRef idx="3">
-            <a:schemeClr val="accent1"/>
-          </a:fillRef>
-          <a:effectRef idx="2">
-            <a:schemeClr val="accent1"/>
-          </a:effectRef>
-          <a:fontRef idx="minor">
-            <a:schemeClr val="lt1"/>
-          </a:fontRef>
-        </p:style>
-        <p:txBody>
-          <a:bodyPr rtlCol="0" anchor="ctr"/>
-          <a:lstStyle/>
-          <a:p>
-            <a:pPr algn="ctr"/>
-          </a:p>
-        </p:txBody>
-      </p:sp>
-      <p:pic>
-        <p:nvPicPr>
-          <p:cNvPr id="9" name="Picture 8" descr="s_lensshow.png"/>
-          <p:cNvPicPr>
-            <a:picLocks noChangeAspect="1"/>
-          </p:cNvPicPr>
-          <p:nvPr/>
-        </p:nvPicPr>
-        <p:blipFill>
-          <a:blip r:embed="rId4"/>
-          <a:stretch>
-            <a:fillRect/>
-          </a:stretch>
-        </p:blipFill>
-        <p:spPr>
-          <a:xfrm>
-            <a:off x="6172200" y="1234440"/>
-            <a:ext cx="5349240" cy="3008947"/>
-          </a:xfrm>
-          <a:prstGeom prst="rect">
-            <a:avLst/>
-          </a:prstGeom>
-        </p:spPr>
-      </p:pic>
-      <p:sp>
-        <p:nvSpPr>
-          <p:cNvPr id="10" name="Rectangle 9"/>
-          <p:cNvSpPr/>
-          <p:nvPr/>
-        </p:nvSpPr>
-        <p:spPr>
-          <a:xfrm>
-            <a:off x="8503920" y="5166360"/>
-            <a:ext cx="685800" cy="91440"/>
-          </a:xfrm>
-          <a:prstGeom prst="rect">
-            <a:avLst/>
-          </a:prstGeom>
-          <a:solidFill>
-            <a:srgbClr val="22262B"/>
-          </a:solidFill>
-          <a:ln>
-            <a:noFill/>
-          </a:ln>
-          <a:effectLst/>
-        </p:spPr>
-        <p:style>
-          <a:lnRef idx="1">
-            <a:schemeClr val="accent1"/>
-          </a:lnRef>
-          <a:fillRef idx="3">
-            <a:schemeClr val="accent1"/>
-          </a:fillRef>
-          <a:effectRef idx="2">
-            <a:schemeClr val="accent1"/>
-          </a:effectRef>
-          <a:fontRef idx="minor">
-            <a:schemeClr val="lt1"/>
-          </a:fontRef>
-        </p:style>
-        <p:txBody>
-          <a:bodyPr rtlCol="0" anchor="ctr"/>
-          <a:lstStyle/>
-          <a:p>
-            <a:pPr algn="ctr"/>
-          </a:p>
-        </p:txBody>
-      </p:sp>
-      <p:sp>
-        <p:nvSpPr>
-          <p:cNvPr id="11" name="Rounded Rectangle 10"/>
-          <p:cNvSpPr/>
-          <p:nvPr/>
-        </p:nvSpPr>
-        <p:spPr>
-          <a:xfrm>
-            <a:off x="7955279" y="5230368"/>
-            <a:ext cx="1783080" cy="109728"/>
-          </a:xfrm>
-          <a:prstGeom prst="roundRect">
-            <a:avLst>
-              <a:gd name="adj" fmla="val 50000"/>
-            </a:avLst>
-          </a:prstGeom>
-          <a:solidFill>
-            <a:srgbClr val="22262B"/>
-          </a:solidFill>
-          <a:ln>
-            <a:noFill/>
-          </a:ln>
-          <a:effectLst/>
-        </p:spPr>
-        <p:style>
-          <a:lnRef idx="1">
-            <a:schemeClr val="accent1"/>
-          </a:lnRef>
-          <a:fillRef idx="3">
-            <a:schemeClr val="accent1"/>
-          </a:fillRef>
-          <a:effectRef idx="2">
-            <a:schemeClr val="accent1"/>
-          </a:effectRef>
-          <a:fontRef idx="minor">
-            <a:schemeClr val="lt1"/>
-          </a:fontRef>
-        </p:style>
-        <p:txBody>
-          <a:bodyPr rtlCol="0" anchor="ctr"/>
-          <a:lstStyle/>
-          <a:p>
-            <a:pPr algn="ctr"/>
-          </a:p>
-        </p:txBody>
-      </p:sp>
-    </p:spTree>
-  </p:cSld>
-  <p:clrMapOvr>
-    <a:masterClrMapping/>
-  </p:clrMapOvr>
-  <p:transition spd="med">
-    <p:fade/>
-  </p:transition>
-  <p:timing>
-    <p:tnLst>
-      <p:par>
-        <p:cTn id="1" dur="indefinite" restart="never" nodeType="tmRoot">
-          <p:childTnLst>
-            <p:seq concurrent="1" nextAc="seek">
-              <p:cTn id="2" dur="indefinite" nodeType="mainSeq">
-                <p:childTnLst>
-                  <p:par>
-                    <p:cTn id="3" fill="hold">
-                      <p:stCondLst>
-                        <p:cond delay="indefinite"/>
-                        <p:cond evt="onBegin" delay="0">
-                          <p:tn val="2"/>
-                        </p:cond>
-                      </p:stCondLst>
-                      <p:childTnLst>
-                        <p:par>
-                          <p:cTn id="4" fill="hold">
-                            <p:stCondLst>
-                              <p:cond delay="0"/>
-                            </p:stCondLst>
-                            <p:childTnLst>
-                              <p:par>
-                                <p:cTn id="5" presetID="10" presetClass="entr" presetSubtype="0" fill="hold" grpId="0" nodeType="afterEffect">
-                                  <p:stCondLst>
-                                    <p:cond delay="0"/>
-                                  </p:stCondLst>
-                                  <p:childTnLst>
-                                    <p:set>
-                                      <p:cBhvr>
-                                        <p:cTn id="6" dur="1" fill="hold">
-                                          <p:stCondLst>
-                                            <p:cond delay="0"/>
-                                          </p:stCondLst>
-                                        </p:cTn>
-                                        <p:tgtEl>
-                                          <p:spTgt spid="7"/>
-                                        </p:tgtEl>
-                                        <p:attrNameLst>
-                                          <p:attrName>style.visibility</p:attrName>
-                                        </p:attrNameLst>
-                                      </p:cBhvr>
-                                      <p:to>
-                                        <p:strVal val="visible"/>
-                                      </p:to>
-                                    </p:set>
-                                    <p:animEffect transition="in" filter="fade">
-                                      <p:cBhvr>
-                                        <p:cTn id="7" dur="400"/>
-                                        <p:tgtEl>
-                                          <p:spTgt spid="7"/>
-                                        </p:tgtEl>
-                                      </p:cBhvr>
-                                    </p:animEffect>
-                                  </p:childTnLst>
-                                </p:cTn>
-                              </p:par>
-                            </p:childTnLst>
-                          </p:cTn>
-                        </p:par>
-                      </p:childTnLst>
-                    </p:cTn>
-                  </p:par>
-                </p:childTnLst>
-              </p:cTn>
-              <p:prevCondLst>
-                <p:cond evt="onPrev" delay="0">
-                  <p:tgtEl>
-                    <p:sldTgt/>
-                  </p:tgtEl>
-                </p:cond>
-              </p:prevCondLst>
-              <p:nextCondLst>
-                <p:cond evt="onNext" delay="0">
-                  <p:tgtEl>
-                    <p:sldTgt/>
-                  </p:tgtEl>
-                </p:cond>
-              </p:nextCondLst>
-            </p:seq>
-          </p:childTnLst>
-        </p:cTn>
-      </p:par>
-    </p:tnLst>
-    <p:bldLst>
-      <p:bldP spid="7" grpId="0" animBg="1"/>
-    </p:bldLst>
-  </p:timing>
-</p:sld>
-</file>
-
-<file path=ppt/slides/slide7.xml><?xml version="1.0" encoding="utf-8"?>
 <p:sld xmlns:a="http://schemas.openxmlformats.org/drawingml/2006/main" xmlns:p="http://schemas.openxmlformats.org/presentationml/2006/main" xmlns:r="http://schemas.openxmlformats.org/officeDocument/2006/relationships">
   <p:cSld>
     <p:spTree>
@@ -9994,7 +7894,7 @@
 </p:sld>
 </file>
 
-<file path=ppt/slides/slide8.xml><?xml version="1.0" encoding="utf-8"?>
+<file path=ppt/slides/slide6.xml><?xml version="1.0" encoding="utf-8"?>
 <p:sld xmlns:a="http://schemas.openxmlformats.org/drawingml/2006/main" xmlns:p="http://schemas.openxmlformats.org/presentationml/2006/main" xmlns:r="http://schemas.openxmlformats.org/officeDocument/2006/relationships">
   <p:cSld>
     <p:spTree>
@@ -10127,7 +8027,7 @@
                 <a:ea typeface="微軟正黑體"/>
                 <a:cs typeface="微軟正黑體"/>
               </a:rPr>
-              <a:t>甲班｜搶答</a:t>
+              <a:t>甲班｜挑戰</a:t>
             </a:r>
           </a:p>
         </p:txBody>
@@ -10168,7 +8068,7 @@
                 <a:ea typeface="微軟正黑體"/>
                 <a:cs typeface="微軟正黑體"/>
               </a:rPr>
-              <a:t>折射環島</a:t>
+              <a:t>折射環島搶答</a:t>
             </a:r>
           </a:p>
         </p:txBody>
@@ -10533,7 +8433,7 @@
 </p:sld>
 </file>
 
-<file path=ppt/slides/slide9.xml><?xml version="1.0" encoding="utf-8"?>
+<file path=ppt/slides/slide7.xml><?xml version="1.0" encoding="utf-8"?>
 <p:sld xmlns:a="http://schemas.openxmlformats.org/drawingml/2006/main" xmlns:p="http://schemas.openxmlformats.org/presentationml/2006/main" xmlns:r="http://schemas.openxmlformats.org/officeDocument/2006/relationships">
   <p:cSld>
     <p:spTree>
@@ -11556,6 +9456,403 @@
 </p:sld>
 </file>
 
+<file path=ppt/slides/slide8.xml><?xml version="1.0" encoding="utf-8"?>
+<p:sld xmlns:a="http://schemas.openxmlformats.org/drawingml/2006/main" xmlns:p="http://schemas.openxmlformats.org/presentationml/2006/main" xmlns:r="http://schemas.openxmlformats.org/officeDocument/2006/relationships">
+  <p:cSld>
+    <p:spTree>
+      <p:nvGrpSpPr>
+        <p:cNvPr id="1" name=""/>
+        <p:cNvGrpSpPr/>
+        <p:nvPr/>
+      </p:nvGrpSpPr>
+      <p:grpSpPr/>
+      <p:sp>
+        <p:nvSpPr>
+          <p:cNvPr id="2" name="Rectangle 1"/>
+          <p:cNvSpPr/>
+          <p:nvPr/>
+        </p:nvSpPr>
+        <p:spPr>
+          <a:xfrm>
+            <a:off x="0" y="0"/>
+            <a:ext cx="12191695" cy="6858000"/>
+          </a:xfrm>
+          <a:prstGeom prst="rect">
+            <a:avLst/>
+          </a:prstGeom>
+          <a:solidFill>
+            <a:srgbClr val="0E1620"/>
+          </a:solidFill>
+          <a:ln>
+            <a:noFill/>
+          </a:ln>
+          <a:effectLst/>
+        </p:spPr>
+        <p:style>
+          <a:lnRef idx="1">
+            <a:schemeClr val="accent1"/>
+          </a:lnRef>
+          <a:fillRef idx="3">
+            <a:schemeClr val="accent1"/>
+          </a:fillRef>
+          <a:effectRef idx="2">
+            <a:schemeClr val="accent1"/>
+          </a:effectRef>
+          <a:fontRef idx="minor">
+            <a:schemeClr val="lt1"/>
+          </a:fontRef>
+        </p:style>
+        <p:txBody>
+          <a:bodyPr rtlCol="0" anchor="ctr"/>
+          <a:lstStyle/>
+          <a:p>
+            <a:pPr algn="ctr"/>
+          </a:p>
+        </p:txBody>
+      </p:sp>
+      <p:pic>
+        <p:nvPicPr>
+          <p:cNvPr id="3" name="Picture 2" descr="stage.jpg"/>
+          <p:cNvPicPr>
+            <a:picLocks noChangeAspect="1"/>
+          </p:cNvPicPr>
+          <p:nvPr/>
+        </p:nvPicPr>
+        <p:blipFill>
+          <a:blip r:embed="rId2"/>
+          <a:stretch>
+            <a:fillRect/>
+          </a:stretch>
+        </p:blipFill>
+        <p:spPr>
+          <a:xfrm>
+            <a:off x="0" y="26729"/>
+            <a:ext cx="12191695" cy="6804540"/>
+          </a:xfrm>
+          <a:prstGeom prst="rect">
+            <a:avLst/>
+          </a:prstGeom>
+        </p:spPr>
+      </p:pic>
+      <p:sp>
+        <p:nvSpPr>
+          <p:cNvPr id="4" name="Rectangle 3"/>
+          <p:cNvSpPr/>
+          <p:nvPr/>
+        </p:nvSpPr>
+        <p:spPr>
+          <a:xfrm>
+            <a:off x="0" y="0"/>
+            <a:ext cx="12191695" cy="6858000"/>
+          </a:xfrm>
+          <a:prstGeom prst="rect">
+            <a:avLst/>
+          </a:prstGeom>
+          <a:solidFill>
+            <a:srgbClr val="0E1620">
+              <a:alpha val="45000"/>
+            </a:srgbClr>
+          </a:solidFill>
+          <a:ln>
+            <a:noFill/>
+          </a:ln>
+          <a:effectLst/>
+        </p:spPr>
+        <p:style>
+          <a:lnRef idx="1">
+            <a:schemeClr val="accent1"/>
+          </a:lnRef>
+          <a:fillRef idx="3">
+            <a:schemeClr val="accent1"/>
+          </a:fillRef>
+          <a:effectRef idx="2">
+            <a:schemeClr val="accent1"/>
+          </a:effectRef>
+          <a:fontRef idx="minor">
+            <a:schemeClr val="lt1"/>
+          </a:fontRef>
+        </p:style>
+        <p:txBody>
+          <a:bodyPr rtlCol="0" anchor="ctr"/>
+          <a:lstStyle/>
+          <a:p>
+            <a:pPr algn="ctr"/>
+          </a:p>
+        </p:txBody>
+      </p:sp>
+      <p:sp>
+        <p:nvSpPr>
+          <p:cNvPr id="5" name="TextBox 4"/>
+          <p:cNvSpPr txBox="1"/>
+          <p:nvPr/>
+        </p:nvSpPr>
+        <p:spPr>
+          <a:xfrm>
+            <a:off x="731520" y="2377440"/>
+            <a:ext cx="10058400" cy="1280160"/>
+          </a:xfrm>
+          <a:prstGeom prst="rect">
+            <a:avLst/>
+          </a:prstGeom>
+          <a:noFill/>
+        </p:spPr>
+        <p:txBody>
+          <a:bodyPr wrap="square" anchor="t" lIns="45720" rIns="45720">
+            <a:spAutoFit/>
+          </a:bodyPr>
+          <a:lstStyle/>
+          <a:p>
+            <a:pPr algn="l">
+              <a:lnSpc>
+                <a:spcPct val="112000"/>
+              </a:lnSpc>
+            </a:pPr>
+            <a:r>
+              <a:rPr sz="7200" b="1">
+                <a:solidFill>
+                  <a:srgbClr val="FFFFFF"/>
+                </a:solidFill>
+                <a:latin typeface="微軟正黑體"/>
+                <a:ea typeface="微軟正黑體"/>
+                <a:cs typeface="微軟正黑體"/>
+              </a:rPr>
+              <a:t>下課囉！</a:t>
+            </a:r>
+          </a:p>
+        </p:txBody>
+      </p:sp>
+      <p:sp>
+        <p:nvSpPr>
+          <p:cNvPr id="6" name="TextBox 5"/>
+          <p:cNvSpPr txBox="1"/>
+          <p:nvPr/>
+        </p:nvSpPr>
+        <p:spPr>
+          <a:xfrm>
+            <a:off x="777240" y="3749039"/>
+            <a:ext cx="10058400" cy="731520"/>
+          </a:xfrm>
+          <a:prstGeom prst="rect">
+            <a:avLst/>
+          </a:prstGeom>
+          <a:noFill/>
+        </p:spPr>
+        <p:txBody>
+          <a:bodyPr wrap="square" anchor="t" lIns="45720" rIns="45720">
+            <a:spAutoFit/>
+          </a:bodyPr>
+          <a:lstStyle/>
+          <a:p>
+            <a:pPr algn="l">
+              <a:lnSpc>
+                <a:spcPct val="112000"/>
+              </a:lnSpc>
+            </a:pPr>
+            <a:r>
+              <a:rPr sz="3000" b="0">
+                <a:solidFill>
+                  <a:srgbClr val="FFE9A8"/>
+                </a:solidFill>
+                <a:latin typeface="微軟正黑體"/>
+                <a:ea typeface="微軟正黑體"/>
+                <a:cs typeface="微軟正黑體"/>
+              </a:rPr>
+              <a:t>今天的光線特勤隊，表現超棒。</a:t>
+            </a:r>
+          </a:p>
+        </p:txBody>
+      </p:sp>
+    </p:spTree>
+  </p:cSld>
+  <p:clrMapOvr>
+    <a:masterClrMapping/>
+  </p:clrMapOvr>
+  <p:transition spd="med">
+    <p:fade/>
+  </p:transition>
+  <p:timing>
+    <p:tnLst>
+      <p:par>
+        <p:cTn id="1" dur="indefinite" restart="never" nodeType="tmRoot">
+          <p:childTnLst>
+            <p:seq concurrent="1" nextAc="seek">
+              <p:cTn id="2" dur="indefinite" nodeType="mainSeq">
+                <p:childTnLst>
+                  <p:par>
+                    <p:cTn id="3" fill="hold">
+                      <p:stCondLst>
+                        <p:cond delay="indefinite"/>
+                        <p:cond evt="onBegin" delay="0">
+                          <p:tn val="2"/>
+                        </p:cond>
+                      </p:stCondLst>
+                      <p:childTnLst>
+                        <p:par>
+                          <p:cTn id="4" fill="hold">
+                            <p:stCondLst>
+                              <p:cond delay="0"/>
+                            </p:stCondLst>
+                            <p:childTnLst>
+                              <p:par>
+                                <p:cTn id="5" presetID="53" presetClass="entr" presetSubtype="16" fill="hold" grpId="0" nodeType="afterEffect">
+                                  <p:stCondLst>
+                                    <p:cond delay="0"/>
+                                  </p:stCondLst>
+                                  <p:childTnLst>
+                                    <p:set>
+                                      <p:cBhvr>
+                                        <p:cTn id="6" dur="1" fill="hold">
+                                          <p:stCondLst>
+                                            <p:cond delay="0"/>
+                                          </p:stCondLst>
+                                        </p:cTn>
+                                        <p:tgtEl>
+                                          <p:spTgt spid="5"/>
+                                        </p:tgtEl>
+                                        <p:attrNameLst>
+                                          <p:attrName>style.visibility</p:attrName>
+                                        </p:attrNameLst>
+                                      </p:cBhvr>
+                                      <p:to>
+                                        <p:strVal val="visible"/>
+                                      </p:to>
+                                    </p:set>
+                                    <p:anim calcmode="lin" valueType="num">
+                                      <p:cBhvr additive="base">
+                                        <p:cTn id="7" dur="500" fill="hold"/>
+                                        <p:tgtEl>
+                                          <p:spTgt spid="5"/>
+                                        </p:tgtEl>
+                                        <p:attrNameLst>
+                                          <p:attrName>ppt_w</p:attrName>
+                                        </p:attrNameLst>
+                                      </p:cBhvr>
+                                      <p:tavLst>
+                                        <p:tav tm="0">
+                                          <p:val>
+                                            <p:strVal val="0"/>
+                                          </p:val>
+                                        </p:tav>
+                                        <p:tav tm="100000">
+                                          <p:val>
+                                            <p:strVal val="#ppt_w"/>
+                                          </p:val>
+                                        </p:tav>
+                                      </p:tavLst>
+                                    </p:anim>
+                                    <p:anim calcmode="lin" valueType="num">
+                                      <p:cBhvr additive="base">
+                                        <p:cTn id="8" dur="500" fill="hold"/>
+                                        <p:tgtEl>
+                                          <p:spTgt spid="5"/>
+                                        </p:tgtEl>
+                                        <p:attrNameLst>
+                                          <p:attrName>ppt_h</p:attrName>
+                                        </p:attrNameLst>
+                                      </p:cBhvr>
+                                      <p:tavLst>
+                                        <p:tav tm="0">
+                                          <p:val>
+                                            <p:strVal val="0"/>
+                                          </p:val>
+                                        </p:tav>
+                                        <p:tav tm="100000">
+                                          <p:val>
+                                            <p:strVal val="#ppt_h"/>
+                                          </p:val>
+                                        </p:tav>
+                                      </p:tavLst>
+                                    </p:anim>
+                                    <p:animEffect transition="in" filter="fade">
+                                      <p:cBhvr>
+                                        <p:cTn id="9" dur="500"/>
+                                        <p:tgtEl>
+                                          <p:spTgt spid="5"/>
+                                        </p:tgtEl>
+                                      </p:cBhvr>
+                                    </p:animEffect>
+                                  </p:childTnLst>
+                                </p:cTn>
+                              </p:par>
+                            </p:childTnLst>
+                          </p:cTn>
+                        </p:par>
+                        <p:par>
+                          <p:cTn id="10" fill="hold">
+                            <p:stCondLst>
+                              <p:cond delay="280"/>
+                            </p:stCondLst>
+                            <p:childTnLst>
+                              <p:par>
+                                <p:cTn id="11" presetID="10" presetClass="entr" presetSubtype="0" fill="hold" grpId="0" nodeType="afterEffect">
+                                  <p:stCondLst>
+                                    <p:cond delay="0"/>
+                                  </p:stCondLst>
+                                  <p:childTnLst>
+                                    <p:set>
+                                      <p:cBhvr>
+                                        <p:cTn id="12" dur="1" fill="hold">
+                                          <p:stCondLst>
+                                            <p:cond delay="0"/>
+                                          </p:stCondLst>
+                                        </p:cTn>
+                                        <p:tgtEl>
+                                          <p:spTgt spid="6"/>
+                                        </p:tgtEl>
+                                        <p:attrNameLst>
+                                          <p:attrName>style.visibility</p:attrName>
+                                        </p:attrNameLst>
+                                      </p:cBhvr>
+                                      <p:to>
+                                        <p:strVal val="visible"/>
+                                      </p:to>
+                                    </p:set>
+                                    <p:animEffect transition="in" filter="fade">
+                                      <p:cBhvr>
+                                        <p:cTn id="13" dur="500"/>
+                                        <p:tgtEl>
+                                          <p:spTgt spid="6"/>
+                                        </p:tgtEl>
+                                      </p:cBhvr>
+                                    </p:animEffect>
+                                  </p:childTnLst>
+                                </p:cTn>
+                              </p:par>
+                            </p:childTnLst>
+                          </p:cTn>
+                        </p:par>
+                      </p:childTnLst>
+                    </p:cTn>
+                  </p:par>
+                </p:childTnLst>
+              </p:cTn>
+              <p:prevCondLst>
+                <p:cond evt="onPrev" delay="0">
+                  <p:tgtEl>
+                    <p:sldTgt/>
+                  </p:tgtEl>
+                </p:cond>
+              </p:prevCondLst>
+              <p:nextCondLst>
+                <p:cond evt="onNext" delay="0">
+                  <p:tgtEl>
+                    <p:sldTgt/>
+                  </p:tgtEl>
+                </p:cond>
+              </p:nextCondLst>
+            </p:seq>
+          </p:childTnLst>
+        </p:cTn>
+      </p:par>
+    </p:tnLst>
+    <p:bldLst>
+      <p:bldP spid="5" grpId="0" animBg="1"/>
+      <p:bldP spid="6" grpId="0" animBg="1"/>
+    </p:bldLst>
+  </p:timing>
+</p:sld>
+</file>
+
 <file path=ppt/theme/theme1.xml><?xml version="1.0" encoding="utf-8"?>
 <a:theme xmlns:a="http://schemas.openxmlformats.org/drawingml/2006/main" name="Office Theme">
   <a:themeElements>
